--- a/slides/Tugas1_SLP_Frans_Alwan_Purba.pptx
+++ b/slides/Tugas1_SLP_Frans_Alwan_Purba.pptx
@@ -4,6 +4,9 @@
   <p:sldMasterIdLst>
     <p:sldMasterId id="2147483648" r:id="rId1"/>
   </p:sldMasterIdLst>
+  <p:notesMasterIdLst>
+    <p:notesMasterId r:id="rId9"/>
+  </p:notesMasterIdLst>
   <p:sldIdLst>
     <p:sldId id="256" r:id="rId2"/>
     <p:sldId id="257" r:id="rId3"/>
@@ -13,9 +16,6 @@
     <p:sldId id="261" r:id="rId7"/>
     <p:sldId id="262" r:id="rId8"/>
   </p:sldIdLst>
-  <p:notesMasterIdLst>
-    <p:notesMasterId r:id="rId9"/>
-  </p:notesMasterIdLst>
   <p:sldSz cx="12192000" cy="6858000"/>
   <p:notesSz cx="6858000" cy="12192000"/>
   <p:defaultTextStyle>
@@ -110,13 +110,20 @@
       </a:defRPr>
     </a:lvl9pPr>
   </p:defaultTextStyle>
+  <p:extLst>
+    <p:ext uri="{EFAFB233-063F-42B5-8137-9DF3F51BA10A}">
+      <p15:sldGuideLst xmlns:p15="http://schemas.microsoft.com/office/powerpoint/2012/main"/>
+    </p:ext>
+  </p:extLst>
 </p:presentation>
 </file>
 
 <file path=ppt/charts/chart1.xml><?xml version="1.0" encoding="utf-8"?>
-<c:chartSpace xmlns:c="http://schemas.openxmlformats.org/drawingml/2006/chart" xmlns:a="http://schemas.openxmlformats.org/drawingml/2006/main" xmlns:r="http://schemas.openxmlformats.org/officeDocument/2006/relationships">
+<c:chartSpace xmlns:c="http://schemas.openxmlformats.org/drawingml/2006/chart" xmlns:a="http://schemas.openxmlformats.org/drawingml/2006/main" xmlns:r="http://schemas.openxmlformats.org/officeDocument/2006/relationships" xmlns:c16r2="http://schemas.microsoft.com/office/drawing/2015/06/chart">
   <c:date1904 val="0"/>
+  <c:lang val="en-US"/>
   <c:roundedCorners val="1"/>
+  <c:style val="2"/>
   <c:chart>
     <c:title>
       <c:tx>
@@ -133,7 +140,7 @@
               </a:defRPr>
             </a:pPr>
             <a:r>
-              <a:rPr sz="1500" b="0" i="0" u="none" strike="noStrike">
+              <a:rPr lang="en-US" sz="1500" b="0" i="0" u="none" strike="noStrike">
                 <a:solidFill>
                   <a:srgbClr val="2C1E48"/>
                 </a:solidFill>
@@ -144,13 +151,13 @@
           </a:p>
         </c:rich>
       </c:tx>
-      <c:layout/>
       <c:overlay val="0"/>
     </c:title>
     <c:autoTitleDeleted val="0"/>
     <c:plotArea>
       <c:layout/>
       <c:lineChart>
+        <c:grouping val="standard"/>
         <c:varyColors val="0"/>
         <c:ser>
           <c:idx val="0"/>
@@ -167,9 +174,6 @@
             </c:strRef>
           </c:tx>
           <c:spPr>
-            <a:solidFill>
-              <a:srgbClr val="44306E"/>
-            </a:solidFill>
             <a:ln w="38100" cap="flat">
               <a:solidFill>
                 <a:srgbClr val="44306E"/>
@@ -179,31 +183,6 @@
             </a:ln>
             <a:effectLst/>
           </c:spPr>
-          <c:invertIfNegative val="0"/>
-          <c:dLbls>
-            <c:numFmt formatCode="#,##0" sourceLinked="0"/>
-            <c:txPr>
-              <a:bodyPr/>
-              <a:lstStyle/>
-              <a:p>
-                <a:pPr>
-                  <a:defRPr b="0" i="0" strike="noStrike" sz="1200" u="none">
-                    <a:solidFill>
-                      <a:srgbClr val="000000"/>
-                    </a:solidFill>
-                    <a:latin typeface="Arial"/>
-                  </a:defRPr>
-                </a:pPr>
-              </a:p>
-            </c:txPr>
-            <c:showLegendKey val="0"/>
-            <c:showVal val="0"/>
-            <c:showCatName val="0"/>
-            <c:showSerName val="0"/>
-            <c:showPercent val="0"/>
-            <c:showBubbleSize val="0"/>
-            <c:showLeaderLines val="0"/>
-          </c:dLbls>
           <c:marker>
             <c:symbol val="circle"/>
             <c:size val="8"/>
@@ -222,29 +201,27 @@
             </c:spPr>
           </c:marker>
           <c:cat>
-            <c:multiLvlStrRef>
+            <c:strRef>
               <c:f>Sheet1!$A$2:$A$6</c:f>
-              <c:multiLvlStrCache>
+              <c:strCache>
                 <c:ptCount val="5"/>
-                <c:lvl>
-                  <c:pt idx="0">
-                    <c:v>1</c:v>
-                  </c:pt>
-                  <c:pt idx="1">
-                    <c:v>2</c:v>
-                  </c:pt>
-                  <c:pt idx="2">
-                    <c:v>3</c:v>
-                  </c:pt>
-                  <c:pt idx="3">
-                    <c:v>4</c:v>
-                  </c:pt>
-                  <c:pt idx="4">
-                    <c:v>5</c:v>
-                  </c:pt>
-                </c:lvl>
-              </c:multiLvlStrCache>
-            </c:multiLvlStrRef>
+                <c:pt idx="0">
+                  <c:v>1</c:v>
+                </c:pt>
+                <c:pt idx="1">
+                  <c:v>2</c:v>
+                </c:pt>
+                <c:pt idx="2">
+                  <c:v>3</c:v>
+                </c:pt>
+                <c:pt idx="3">
+                  <c:v>4</c:v>
+                </c:pt>
+                <c:pt idx="4">
+                  <c:v>5</c:v>
+                </c:pt>
+              </c:strCache>
+            </c:strRef>
           </c:cat>
           <c:val>
             <c:numRef>
@@ -271,6 +248,11 @@
             </c:numRef>
           </c:val>
           <c:smooth val="0"/>
+          <c:extLst>
+            <c:ext xmlns:c16="http://schemas.microsoft.com/office/drawing/2014/chart" uri="{C3380CC4-5D6E-409C-BE32-E72D297353CC}">
+              <c16:uniqueId val="{00000000-470C-42AC-91C2-970747627469}"/>
+            </c:ext>
+          </c:extLst>
         </c:ser>
         <c:ser>
           <c:idx val="1"/>
@@ -287,9 +269,6 @@
             </c:strRef>
           </c:tx>
           <c:spPr>
-            <a:solidFill>
-              <a:srgbClr val="D9A441"/>
-            </a:solidFill>
             <a:ln w="38100" cap="flat">
               <a:solidFill>
                 <a:srgbClr val="D9A441"/>
@@ -299,31 +278,6 @@
             </a:ln>
             <a:effectLst/>
           </c:spPr>
-          <c:invertIfNegative val="0"/>
-          <c:dLbls>
-            <c:numFmt formatCode="#,##0" sourceLinked="0"/>
-            <c:txPr>
-              <a:bodyPr/>
-              <a:lstStyle/>
-              <a:p>
-                <a:pPr>
-                  <a:defRPr b="0" i="0" strike="noStrike" sz="1200" u="none">
-                    <a:solidFill>
-                      <a:srgbClr val="000000"/>
-                    </a:solidFill>
-                    <a:latin typeface="Arial"/>
-                  </a:defRPr>
-                </a:pPr>
-              </a:p>
-            </c:txPr>
-            <c:showLegendKey val="0"/>
-            <c:showVal val="0"/>
-            <c:showCatName val="0"/>
-            <c:showSerName val="0"/>
-            <c:showPercent val="0"/>
-            <c:showBubbleSize val="0"/>
-            <c:showLeaderLines val="0"/>
-          </c:dLbls>
           <c:marker>
             <c:symbol val="circle"/>
             <c:size val="8"/>
@@ -342,29 +296,27 @@
             </c:spPr>
           </c:marker>
           <c:cat>
-            <c:multiLvlStrRef>
+            <c:strRef>
               <c:f>Sheet1!$A$2:$A$6</c:f>
-              <c:multiLvlStrCache>
+              <c:strCache>
                 <c:ptCount val="5"/>
-                <c:lvl>
-                  <c:pt idx="0">
-                    <c:v>1</c:v>
-                  </c:pt>
-                  <c:pt idx="1">
-                    <c:v>2</c:v>
-                  </c:pt>
-                  <c:pt idx="2">
-                    <c:v>3</c:v>
-                  </c:pt>
-                  <c:pt idx="3">
-                    <c:v>4</c:v>
-                  </c:pt>
-                  <c:pt idx="4">
-                    <c:v>5</c:v>
-                  </c:pt>
-                </c:lvl>
-              </c:multiLvlStrCache>
-            </c:multiLvlStrRef>
+                <c:pt idx="0">
+                  <c:v>1</c:v>
+                </c:pt>
+                <c:pt idx="1">
+                  <c:v>2</c:v>
+                </c:pt>
+                <c:pt idx="2">
+                  <c:v>3</c:v>
+                </c:pt>
+                <c:pt idx="3">
+                  <c:v>4</c:v>
+                </c:pt>
+                <c:pt idx="4">
+                  <c:v>5</c:v>
+                </c:pt>
+              </c:strCache>
+            </c:strRef>
           </c:cat>
           <c:val>
             <c:numRef>
@@ -391,35 +343,24 @@
             </c:numRef>
           </c:val>
           <c:smooth val="0"/>
+          <c:extLst>
+            <c:ext xmlns:c16="http://schemas.microsoft.com/office/drawing/2014/chart" uri="{C3380CC4-5D6E-409C-BE32-E72D297353CC}">
+              <c16:uniqueId val="{00000001-470C-42AC-91C2-970747627469}"/>
+            </c:ext>
+          </c:extLst>
         </c:ser>
         <c:dLbls>
-          <c:numFmt formatCode="#,##0" sourceLinked="0"/>
-          <c:txPr>
-            <a:bodyPr/>
-            <a:lstStyle/>
-            <a:p>
-              <a:pPr>
-                <a:defRPr b="0" i="0" strike="noStrike" sz="1200" u="none">
-                  <a:solidFill>
-                    <a:srgbClr val="000000"/>
-                  </a:solidFill>
-                  <a:latin typeface="Arial"/>
-                </a:defRPr>
-              </a:pPr>
-            </a:p>
-          </c:txPr>
           <c:showLegendKey val="0"/>
           <c:showVal val="0"/>
           <c:showCatName val="0"/>
           <c:showSerName val="0"/>
           <c:showPercent val="0"/>
           <c:showBubbleSize val="0"/>
-          <c:showLeaderLines val="0"/>
         </c:dLbls>
         <c:marker val="1"/>
+        <c:smooth val="0"/>
         <c:axId val="2094734554"/>
         <c:axId val="2094734552"/>
-        <c:axId val="2094734556"/>
       </c:lineChart>
       <c:catAx>
         <c:axId val="2094734554"/>
@@ -443,7 +384,7 @@
                   </a:defRPr>
                 </a:pPr>
                 <a:r>
-                  <a:rPr sz="1100" b="0" i="0" u="none" strike="noStrike">
+                  <a:rPr lang="en-US" sz="1100" b="0" i="0" u="none" strike="noStrike">
                     <a:solidFill>
                       <a:srgbClr val="6E6580"/>
                     </a:solidFill>
@@ -454,7 +395,6 @@
               </a:p>
             </c:rich>
           </c:tx>
-          <c:layout/>
           <c:overlay val="0"/>
         </c:title>
         <c:numFmt formatCode="General" sourceLinked="1"/>
@@ -489,6 +429,7 @@
         <c:crosses val="autoZero"/>
         <c:auto val="1"/>
         <c:lblAlgn val="ctr"/>
+        <c:lblOffset val="100"/>
         <c:noMultiLvlLbl val="1"/>
       </c:catAx>
       <c:valAx>
@@ -572,6 +513,7 @@
     </c:legend>
     <c:plotVisOnly val="1"/>
     <c:dispBlanksAs val="span"/>
+    <c:showDLblsOverMax val="1"/>
   </c:chart>
   <c:spPr>
     <a:noFill/>
@@ -587,9 +529,11 @@
 </file>
 
 <file path=ppt/charts/chart2.xml><?xml version="1.0" encoding="utf-8"?>
-<c:chartSpace xmlns:c="http://schemas.openxmlformats.org/drawingml/2006/chart" xmlns:a="http://schemas.openxmlformats.org/drawingml/2006/main" xmlns:r="http://schemas.openxmlformats.org/officeDocument/2006/relationships">
+<c:chartSpace xmlns:c="http://schemas.openxmlformats.org/drawingml/2006/chart" xmlns:a="http://schemas.openxmlformats.org/drawingml/2006/main" xmlns:r="http://schemas.openxmlformats.org/officeDocument/2006/relationships" xmlns:c16r2="http://schemas.microsoft.com/office/drawing/2015/06/chart">
   <c:date1904 val="0"/>
+  <c:lang val="en-US"/>
   <c:roundedCorners val="1"/>
+  <c:style val="2"/>
   <c:chart>
     <c:title>
       <c:tx>
@@ -606,7 +550,7 @@
               </a:defRPr>
             </a:pPr>
             <a:r>
-              <a:rPr sz="1500" b="0" i="0" u="none" strike="noStrike">
+              <a:rPr lang="en-US" sz="1500" b="0" i="0" u="none" strike="noStrike">
                 <a:solidFill>
                   <a:srgbClr val="2C1E48"/>
                 </a:solidFill>
@@ -617,13 +561,13 @@
           </a:p>
         </c:rich>
       </c:tx>
-      <c:layout/>
       <c:overlay val="0"/>
     </c:title>
     <c:autoTitleDeleted val="0"/>
     <c:plotArea>
       <c:layout/>
       <c:lineChart>
+        <c:grouping val="standard"/>
         <c:varyColors val="0"/>
         <c:ser>
           <c:idx val="0"/>
@@ -640,9 +584,6 @@
             </c:strRef>
           </c:tx>
           <c:spPr>
-            <a:solidFill>
-              <a:srgbClr val="44306E"/>
-            </a:solidFill>
             <a:ln w="38100" cap="flat">
               <a:solidFill>
                 <a:srgbClr val="44306E"/>
@@ -652,31 +593,6 @@
             </a:ln>
             <a:effectLst/>
           </c:spPr>
-          <c:invertIfNegative val="0"/>
-          <c:dLbls>
-            <c:numFmt formatCode="#,##0" sourceLinked="0"/>
-            <c:txPr>
-              <a:bodyPr/>
-              <a:lstStyle/>
-              <a:p>
-                <a:pPr>
-                  <a:defRPr b="0" i="0" strike="noStrike" sz="1200" u="none">
-                    <a:solidFill>
-                      <a:srgbClr val="000000"/>
-                    </a:solidFill>
-                    <a:latin typeface="Arial"/>
-                  </a:defRPr>
-                </a:pPr>
-              </a:p>
-            </c:txPr>
-            <c:showLegendKey val="0"/>
-            <c:showVal val="0"/>
-            <c:showCatName val="0"/>
-            <c:showSerName val="0"/>
-            <c:showPercent val="0"/>
-            <c:showBubbleSize val="0"/>
-            <c:showLeaderLines val="0"/>
-          </c:dLbls>
           <c:marker>
             <c:symbol val="circle"/>
             <c:size val="8"/>
@@ -695,29 +611,27 @@
             </c:spPr>
           </c:marker>
           <c:cat>
-            <c:multiLvlStrRef>
+            <c:strRef>
               <c:f>Sheet1!$A$2:$A$6</c:f>
-              <c:multiLvlStrCache>
+              <c:strCache>
                 <c:ptCount val="5"/>
-                <c:lvl>
-                  <c:pt idx="0">
-                    <c:v>1</c:v>
-                  </c:pt>
-                  <c:pt idx="1">
-                    <c:v>2</c:v>
-                  </c:pt>
-                  <c:pt idx="2">
-                    <c:v>3</c:v>
-                  </c:pt>
-                  <c:pt idx="3">
-                    <c:v>4</c:v>
-                  </c:pt>
-                  <c:pt idx="4">
-                    <c:v>5</c:v>
-                  </c:pt>
-                </c:lvl>
-              </c:multiLvlStrCache>
-            </c:multiLvlStrRef>
+                <c:pt idx="0">
+                  <c:v>1</c:v>
+                </c:pt>
+                <c:pt idx="1">
+                  <c:v>2</c:v>
+                </c:pt>
+                <c:pt idx="2">
+                  <c:v>3</c:v>
+                </c:pt>
+                <c:pt idx="3">
+                  <c:v>4</c:v>
+                </c:pt>
+                <c:pt idx="4">
+                  <c:v>5</c:v>
+                </c:pt>
+              </c:strCache>
+            </c:strRef>
           </c:cat>
           <c:val>
             <c:numRef>
@@ -729,21 +643,26 @@
                   <c:v>0.44715463</c:v>
                 </c:pt>
                 <c:pt idx="1">
-                  <c:v>0.04486284</c:v>
+                  <c:v>4.4862840000000001E-2</c:v>
                 </c:pt>
                 <c:pt idx="2">
-                  <c:v>0.0238117</c:v>
+                  <c:v>2.3811700000000002E-2</c:v>
                 </c:pt>
                 <c:pt idx="3">
-                  <c:v>0.01511584</c:v>
+                  <c:v>1.511584E-2</c:v>
                 </c:pt>
                 <c:pt idx="4">
-                  <c:v>0.01083626</c:v>
+                  <c:v>1.083626E-2</c:v>
                 </c:pt>
               </c:numCache>
             </c:numRef>
           </c:val>
           <c:smooth val="0"/>
+          <c:extLst>
+            <c:ext xmlns:c16="http://schemas.microsoft.com/office/drawing/2014/chart" uri="{C3380CC4-5D6E-409C-BE32-E72D297353CC}">
+              <c16:uniqueId val="{00000000-EDCE-4AD8-A958-5BD3D7DB4DF1}"/>
+            </c:ext>
+          </c:extLst>
         </c:ser>
         <c:ser>
           <c:idx val="1"/>
@@ -760,9 +679,6 @@
             </c:strRef>
           </c:tx>
           <c:spPr>
-            <a:solidFill>
-              <a:srgbClr val="D9A441"/>
-            </a:solidFill>
             <a:ln w="38100" cap="flat">
               <a:solidFill>
                 <a:srgbClr val="D9A441"/>
@@ -772,31 +688,6 @@
             </a:ln>
             <a:effectLst/>
           </c:spPr>
-          <c:invertIfNegative val="0"/>
-          <c:dLbls>
-            <c:numFmt formatCode="#,##0" sourceLinked="0"/>
-            <c:txPr>
-              <a:bodyPr/>
-              <a:lstStyle/>
-              <a:p>
-                <a:pPr>
-                  <a:defRPr b="0" i="0" strike="noStrike" sz="1200" u="none">
-                    <a:solidFill>
-                      <a:srgbClr val="000000"/>
-                    </a:solidFill>
-                    <a:latin typeface="Arial"/>
-                  </a:defRPr>
-                </a:pPr>
-              </a:p>
-            </c:txPr>
-            <c:showLegendKey val="0"/>
-            <c:showVal val="0"/>
-            <c:showCatName val="0"/>
-            <c:showSerName val="0"/>
-            <c:showPercent val="0"/>
-            <c:showBubbleSize val="0"/>
-            <c:showLeaderLines val="0"/>
-          </c:dLbls>
           <c:marker>
             <c:symbol val="circle"/>
             <c:size val="8"/>
@@ -815,29 +706,27 @@
             </c:spPr>
           </c:marker>
           <c:cat>
-            <c:multiLvlStrRef>
+            <c:strRef>
               <c:f>Sheet1!$A$2:$A$6</c:f>
-              <c:multiLvlStrCache>
+              <c:strCache>
                 <c:ptCount val="5"/>
-                <c:lvl>
-                  <c:pt idx="0">
-                    <c:v>1</c:v>
-                  </c:pt>
-                  <c:pt idx="1">
-                    <c:v>2</c:v>
-                  </c:pt>
-                  <c:pt idx="2">
-                    <c:v>3</c:v>
-                  </c:pt>
-                  <c:pt idx="3">
-                    <c:v>4</c:v>
-                  </c:pt>
-                  <c:pt idx="4">
-                    <c:v>5</c:v>
-                  </c:pt>
-                </c:lvl>
-              </c:multiLvlStrCache>
-            </c:multiLvlStrRef>
+                <c:pt idx="0">
+                  <c:v>1</c:v>
+                </c:pt>
+                <c:pt idx="1">
+                  <c:v>2</c:v>
+                </c:pt>
+                <c:pt idx="2">
+                  <c:v>3</c:v>
+                </c:pt>
+                <c:pt idx="3">
+                  <c:v>4</c:v>
+                </c:pt>
+                <c:pt idx="4">
+                  <c:v>5</c:v>
+                </c:pt>
+              </c:strCache>
+            </c:strRef>
           </c:cat>
           <c:val>
             <c:numRef>
@@ -846,53 +735,42 @@
                 <c:formatCode>General</c:formatCode>
                 <c:ptCount val="5"/>
                 <c:pt idx="0">
-                  <c:v>0.28755158</c:v>
+                  <c:v>0.28755157999999997</c:v>
                 </c:pt>
                 <c:pt idx="1">
-                  <c:v>0.15501014</c:v>
+                  <c:v>0.15501013999999999</c:v>
                 </c:pt>
                 <c:pt idx="2">
-                  <c:v>0.07774028</c:v>
+                  <c:v>7.7740279999999995E-2</c:v>
                 </c:pt>
                 <c:pt idx="3">
-                  <c:v>0.04165461</c:v>
+                  <c:v>4.1654610000000002E-2</c:v>
                 </c:pt>
                 <c:pt idx="4">
-                  <c:v>0.02509921</c:v>
+                  <c:v>2.509921E-2</c:v>
                 </c:pt>
               </c:numCache>
             </c:numRef>
           </c:val>
           <c:smooth val="0"/>
+          <c:extLst>
+            <c:ext xmlns:c16="http://schemas.microsoft.com/office/drawing/2014/chart" uri="{C3380CC4-5D6E-409C-BE32-E72D297353CC}">
+              <c16:uniqueId val="{00000001-EDCE-4AD8-A958-5BD3D7DB4DF1}"/>
+            </c:ext>
+          </c:extLst>
         </c:ser>
         <c:dLbls>
-          <c:numFmt formatCode="#,##0" sourceLinked="0"/>
-          <c:txPr>
-            <a:bodyPr/>
-            <a:lstStyle/>
-            <a:p>
-              <a:pPr>
-                <a:defRPr b="0" i="0" strike="noStrike" sz="1200" u="none">
-                  <a:solidFill>
-                    <a:srgbClr val="000000"/>
-                  </a:solidFill>
-                  <a:latin typeface="Arial"/>
-                </a:defRPr>
-              </a:pPr>
-            </a:p>
-          </c:txPr>
           <c:showLegendKey val="0"/>
           <c:showVal val="0"/>
           <c:showCatName val="0"/>
           <c:showSerName val="0"/>
           <c:showPercent val="0"/>
           <c:showBubbleSize val="0"/>
-          <c:showLeaderLines val="0"/>
         </c:dLbls>
         <c:marker val="1"/>
+        <c:smooth val="0"/>
         <c:axId val="2094734554"/>
         <c:axId val="2094734552"/>
-        <c:axId val="2094734556"/>
       </c:lineChart>
       <c:catAx>
         <c:axId val="2094734554"/>
@@ -916,7 +794,7 @@
                   </a:defRPr>
                 </a:pPr>
                 <a:r>
-                  <a:rPr sz="1100" b="0" i="0" u="none" strike="noStrike">
+                  <a:rPr lang="en-US" sz="1100" b="0" i="0" u="none" strike="noStrike">
                     <a:solidFill>
                       <a:srgbClr val="6E6580"/>
                     </a:solidFill>
@@ -927,7 +805,6 @@
               </a:p>
             </c:rich>
           </c:tx>
-          <c:layout/>
           <c:overlay val="0"/>
         </c:title>
         <c:numFmt formatCode="General" sourceLinked="1"/>
@@ -962,6 +839,7 @@
         <c:crosses val="autoZero"/>
         <c:auto val="1"/>
         <c:lblAlgn val="ctr"/>
+        <c:lblOffset val="100"/>
         <c:noMultiLvlLbl val="1"/>
       </c:catAx>
       <c:valAx>
@@ -1045,6 +923,7 @@
     </c:legend>
     <c:plotVisOnly val="1"/>
     <c:dispBlanksAs val="span"/>
+    <c:showDLblsOverMax val="1"/>
   </c:chart>
   <c:spPr>
     <a:noFill/>
@@ -1081,234 +960,10 @@
           <a:chExt cx="0" cy="0"/>
         </a:xfrm>
       </p:grpSpPr>
-      <p:sp>
-        <p:nvSpPr>
-          <p:cNvPr id="2" name="Header Placeholder 1"/>
-          <p:cNvSpPr>
-            <a:spLocks noGrp="1"/>
-          </p:cNvSpPr>
-          <p:nvPr>
-            <p:ph type="hdr" sz="quarter"/>
-          </p:nvPr>
-        </p:nvSpPr>
-        <p:spPr>
-          <a:xfrm>
-            <a:off x="0" y="0"/>
-            <a:ext cx="2971800" cy="458788"/>
-          </a:xfrm>
-          <a:prstGeom prst="rect">
-            <a:avLst/>
-          </a:prstGeom>
-        </p:spPr>
-        <p:txBody>
-          <a:bodyPr vert="horz" lIns="91440" tIns="45720" rIns="91440" bIns="45720" rtlCol="0"/>
-          <a:lstStyle>
-            <a:lvl1pPr algn="l">
-              <a:defRPr sz="1200"/>
-            </a:lvl1pPr>
-          </a:lstStyle>
-          <a:p>
-            <a:endParaRPr lang="en-US"/>
-          </a:p>
-        </p:txBody>
-      </p:sp>
-      <p:sp>
-        <p:nvSpPr>
-          <p:cNvPr id="3" name="Date Placeholder 2"/>
-          <p:cNvSpPr>
-            <a:spLocks noGrp="1"/>
-          </p:cNvSpPr>
-          <p:nvPr>
-            <p:ph type="dt" idx="1"/>
-          </p:nvPr>
-        </p:nvSpPr>
-        <p:spPr>
-          <a:xfrm>
-            <a:off x="3884613" y="0"/>
-            <a:ext cx="2971800" cy="458788"/>
-          </a:xfrm>
-          <a:prstGeom prst="rect">
-            <a:avLst/>
-          </a:prstGeom>
-        </p:spPr>
-        <p:txBody>
-          <a:bodyPr vert="horz" lIns="91440" tIns="45720" rIns="91440" bIns="45720" rtlCol="0"/>
-          <a:lstStyle>
-            <a:lvl1pPr algn="r">
-              <a:defRPr sz="1200"/>
-            </a:lvl1pPr>
-          </a:lstStyle>
-          <a:p>
-            <a:fld id="{5282F153-3F37-0F45-9E97-73ACFA13230C}" type="datetimeFigureOut">
-              <a:rPr lang="en-US"/>
-              <a:t>7/23/19</a:t>
-            </a:fld>
-            <a:endParaRPr lang="en-US"/>
-          </a:p>
-        </p:txBody>
-      </p:sp>
-      <p:sp>
-        <p:nvSpPr>
-          <p:cNvPr id="4" name="Slide Image Placeholder 3"/>
-          <p:cNvSpPr>
-            <a:spLocks noGrp="1" noRot="1" noChangeAspect="1"/>
-          </p:cNvSpPr>
-          <p:nvPr>
-            <p:ph type="sldImg" idx="2"/>
-          </p:nvPr>
-        </p:nvSpPr>
-        <p:spPr>
-          <a:xfrm>
-            <a:off x="685800" y="1143000"/>
-            <a:ext cx="5486400" cy="3086100"/>
-          </a:xfrm>
-          <a:prstGeom prst="rect">
-            <a:avLst/>
-          </a:prstGeom>
-          <a:noFill/>
-          <a:ln w="12700">
-            <a:solidFill>
-              <a:prstClr val="black"/>
-            </a:solidFill>
-          </a:ln>
-        </p:spPr>
-        <p:txBody>
-          <a:bodyPr vert="horz" lIns="91440" tIns="45720" rIns="91440" bIns="45720" rtlCol="0" anchor="ctr"/>
-          <a:lstStyle/>
-          <a:p>
-            <a:endParaRPr lang="en-US"/>
-          </a:p>
-        </p:txBody>
-      </p:sp>
-      <p:sp>
-        <p:nvSpPr>
-          <p:cNvPr id="5" name="Notes Placeholder 4"/>
-          <p:cNvSpPr>
-            <a:spLocks noGrp="1"/>
-          </p:cNvSpPr>
-          <p:nvPr>
-            <p:ph type="body" sz="quarter" idx="3"/>
-          </p:nvPr>
-        </p:nvSpPr>
-        <p:spPr>
-          <a:xfrm>
-            <a:off x="685800" y="4400550"/>
-            <a:ext cx="5486400" cy="3600450"/>
-          </a:xfrm>
-          <a:prstGeom prst="rect">
-            <a:avLst/>
-          </a:prstGeom>
-        </p:spPr>
-        <p:txBody>
-          <a:bodyPr vert="horz" lIns="91440" tIns="45720" rIns="91440" bIns="45720" rtlCol="0"/>
-          <a:lstStyle/>
-          <a:p>
-            <a:pPr lvl="0"/>
-            <a:r>
-              <a:rPr lang="en-US"/>
-              <a:t>Click to edit Master text styles</a:t>
-            </a:r>
-          </a:p>
-          <a:p>
-            <a:pPr lvl="1"/>
-            <a:r>
-              <a:rPr lang="en-US"/>
-              <a:t>Second level</a:t>
-            </a:r>
-          </a:p>
-          <a:p>
-            <a:pPr lvl="2"/>
-            <a:r>
-              <a:rPr lang="en-US"/>
-              <a:t>Third level</a:t>
-            </a:r>
-          </a:p>
-          <a:p>
-            <a:pPr lvl="3"/>
-            <a:r>
-              <a:rPr lang="en-US"/>
-              <a:t>Fourth level</a:t>
-            </a:r>
-          </a:p>
-          <a:p>
-            <a:pPr lvl="4"/>
-            <a:r>
-              <a:rPr lang="en-US"/>
-              <a:t>Fifth level</a:t>
-            </a:r>
-          </a:p>
-        </p:txBody>
-      </p:sp>
-      <p:sp>
-        <p:nvSpPr>
-          <p:cNvPr id="6" name="Footer Placeholder 5"/>
-          <p:cNvSpPr>
-            <a:spLocks noGrp="1"/>
-          </p:cNvSpPr>
-          <p:nvPr>
-            <p:ph type="ftr" sz="quarter" idx="4"/>
-          </p:nvPr>
-        </p:nvSpPr>
-        <p:spPr>
-          <a:xfrm>
-            <a:off x="0" y="8685213"/>
-            <a:ext cx="2971800" cy="458787"/>
-          </a:xfrm>
-          <a:prstGeom prst="rect">
-            <a:avLst/>
-          </a:prstGeom>
-        </p:spPr>
-        <p:txBody>
-          <a:bodyPr vert="horz" lIns="91440" tIns="45720" rIns="91440" bIns="45720" rtlCol="0" anchor="b"/>
-          <a:lstStyle>
-            <a:lvl1pPr algn="l">
-              <a:defRPr sz="1200"/>
-            </a:lvl1pPr>
-          </a:lstStyle>
-          <a:p>
-            <a:endParaRPr lang="en-US"/>
-          </a:p>
-        </p:txBody>
-      </p:sp>
-      <p:sp>
-        <p:nvSpPr>
-          <p:cNvPr id="7" name="Slide Number Placeholder 6"/>
-          <p:cNvSpPr>
-            <a:spLocks noGrp="1"/>
-          </p:cNvSpPr>
-          <p:nvPr>
-            <p:ph type="sldNum" sz="quarter" idx="5"/>
-          </p:nvPr>
-        </p:nvSpPr>
-        <p:spPr>
-          <a:xfrm>
-            <a:off x="3884613" y="8685213"/>
-            <a:ext cx="2971800" cy="458787"/>
-          </a:xfrm>
-          <a:prstGeom prst="rect">
-            <a:avLst/>
-          </a:prstGeom>
-        </p:spPr>
-        <p:txBody>
-          <a:bodyPr vert="horz" lIns="91440" tIns="45720" rIns="91440" bIns="45720" rtlCol="0" anchor="b"/>
-          <a:lstStyle>
-            <a:lvl1pPr algn="r">
-              <a:defRPr sz="1200"/>
-            </a:lvl1pPr>
-          </a:lstStyle>
-          <a:p>
-            <a:fld id="{CE5E9CC1-C706-0F49-92D6-E571CC5EEA8F}" type="slidenum">
-              <a:rPr lang="en-US"/>
-              <a:t>‹#›</a:t>
-            </a:fld>
-            <a:endParaRPr lang="en-US"/>
-          </a:p>
-        </p:txBody>
-      </p:sp>
     </p:spTree>
     <p:extLst>
       <p:ext uri="{BB962C8B-B14F-4D97-AF65-F5344CB8AC3E}">
-        <p14:creationId xmlns:p14="http://schemas.microsoft.com/office/powerpoint/2010/main" val="1024086991"/>
+        <p14:creationId xmlns:p14="http://schemas.microsoft.com/office/powerpoint/2010/main" val="53892210"/>
       </p:ext>
     </p:extLst>
   </p:cSld>
@@ -1456,7 +1111,6 @@
               <a:rPr lang="en-US" dirty="0"/>
               <a:t>Assignment 1 - Single Layer Perceptron. Frans Alwan Purba, NIM 25/563545/PPA/07116.</a:t>
             </a:r>
-            <a:endParaRPr lang="en-US" dirty="0"/>
           </a:p>
         </p:txBody>
       </p:sp>
@@ -1544,7 +1198,6 @@
               <a:rPr lang="en-US" dirty="0"/>
               <a:t>Grafik akurasi yang diambil dari spreadsheet. Perhatikan akurasi validation yang tertahan di 50% pada dua epoch pertama.</a:t>
             </a:r>
-            <a:endParaRPr lang="en-US" dirty="0"/>
           </a:p>
         </p:txBody>
       </p:sp>
@@ -1632,7 +1285,6 @@
               <a:rPr lang="en-US" dirty="0"/>
               <a:t>Grafik yang sama, tapi dihasilkan matplotlib dari kode Python. Tabel di bawah sengaja diulang agar mudah dibandingkan dengan halaman sebelumnya.</a:t>
             </a:r>
-            <a:endParaRPr lang="en-US" dirty="0"/>
           </a:p>
         </p:txBody>
       </p:sp>
@@ -1720,7 +1372,6 @@
               <a:rPr lang="en-US" dirty="0"/>
               <a:t>Grafik loss dari spreadsheet. Penurunan terbesar terjadi sekali di awal.</a:t>
             </a:r>
-            <a:endParaRPr lang="en-US" dirty="0"/>
           </a:p>
         </p:txBody>
       </p:sp>
@@ -1808,7 +1459,6 @@
               <a:rPr lang="en-US" dirty="0"/>
               <a:t>Tanpa penyesuaian nomor 3, MSE validation epoch 1 keluar 0.29054 dan bukan 0.28755.</a:t>
             </a:r>
-            <a:endParaRPr lang="en-US" dirty="0"/>
           </a:p>
         </p:txBody>
       </p:sp>
@@ -1896,7 +1546,6 @@
               <a:rPr lang="en-US" dirty="0"/>
               <a:t>GANTI kedua URL placeholder dengan tautan sebenarnya sebelum diunggah ke SIMASTER. Pastikan sharing Google Sheets diset ke 'Anyone with the link can view' dan repositori GitHub bersifat public.</a:t>
             </a:r>
-            <a:endParaRPr lang="en-US" dirty="0"/>
           </a:p>
         </p:txBody>
       </p:sp>
@@ -1980,10 +1629,6 @@
           <a:bodyPr/>
           <a:lstStyle/>
           <a:p>
-            <a:r>
-              <a:rPr lang="en-US" dirty="0"/>
-              <a:t/>
-            </a:r>
             <a:endParaRPr lang="en-US" dirty="0"/>
           </a:p>
         </p:txBody>
@@ -2057,6 +1702,11 @@
 <file path=ppt/slideMasters/slideMaster1.xml><?xml version="1.0" encoding="utf-8"?>
 <p:sldMaster xmlns:a="http://schemas.openxmlformats.org/drawingml/2006/main" xmlns:r="http://schemas.openxmlformats.org/officeDocument/2006/relationships" xmlns:p="http://schemas.openxmlformats.org/presentationml/2006/main">
   <p:cSld>
+    <p:bg>
+      <p:bgRef idx="1001">
+        <a:schemeClr val="bg1"/>
+      </p:bgRef>
+    </p:bg>
     <p:spTree>
       <p:nvGrpSpPr>
         <p:cNvPr id="1" name=""/>
@@ -2339,6 +1989,7 @@
         <a:solidFill>
           <a:srgbClr val="2C1E48"/>
         </a:solidFill>
+        <a:effectLst/>
       </p:bgPr>
     </p:bg>
     <p:spTree>
@@ -2355,50 +2006,6 @@
           <a:chExt cx="0" cy="0"/>
         </a:xfrm>
       </p:grpSpPr>
-      <p:sp>
-        <p:nvSpPr>
-          <p:cNvPr id="2" name="Shape 0"/>
-          <p:cNvSpPr/>
-          <p:nvPr/>
-        </p:nvSpPr>
-        <p:spPr>
-          <a:xfrm>
-            <a:off x="9144000" y="-1554480"/>
-            <a:ext cx="4937760" cy="4937760"/>
-          </a:xfrm>
-          <a:prstGeom prst="ellipse">
-            <a:avLst/>
-          </a:prstGeom>
-          <a:solidFill>
-            <a:srgbClr val="44306E">
-              <a:alpha val="70000"/>
-            </a:srgbClr>
-          </a:solidFill>
-          <a:ln/>
-        </p:spPr>
-      </p:sp>
-      <p:sp>
-        <p:nvSpPr>
-          <p:cNvPr id="3" name="Shape 1"/>
-          <p:cNvSpPr/>
-          <p:nvPr/>
-        </p:nvSpPr>
-        <p:spPr>
-          <a:xfrm>
-            <a:off x="10515600" y="4206240"/>
-            <a:ext cx="3108960" cy="3108960"/>
-          </a:xfrm>
-          <a:prstGeom prst="ellipse">
-            <a:avLst/>
-          </a:prstGeom>
-          <a:solidFill>
-            <a:srgbClr val="D9A441">
-              <a:alpha val="25000"/>
-            </a:srgbClr>
-          </a:solidFill>
-          <a:ln/>
-        </p:spPr>
-      </p:sp>
       <p:sp>
         <p:nvSpPr>
           <p:cNvPr id="4" name="Text 2"/>
@@ -2420,11 +2027,11 @@
           <a:bodyPr wrap="square" lIns="0" tIns="0" rIns="0" bIns="0" rtlCol="0" anchor="ctr"/>
           <a:lstStyle/>
           <a:p>
-            <a:pPr indent="0" marL="0">
+            <a:pPr marL="0" indent="0">
               <a:buNone/>
             </a:pPr>
             <a:r>
-              <a:rPr lang="en-US" sz="1300" b="1" spc="300" kern="0" dirty="0">
+              <a:rPr lang="en-US" sz="1300" b="1" kern="0" spc="300" dirty="0">
                 <a:solidFill>
                   <a:srgbClr val="D9A441"/>
                 </a:solidFill>
@@ -2459,7 +2066,7 @@
           <a:bodyPr wrap="square" lIns="0" tIns="0" rIns="0" bIns="0" rtlCol="0" anchor="ctr"/>
           <a:lstStyle/>
           <a:p>
-            <a:pPr indent="0" marL="0">
+            <a:pPr marL="0" indent="0">
               <a:lnSpc>
                 <a:spcPts val="4600"/>
               </a:lnSpc>
@@ -2479,7 +2086,7 @@
             <a:endParaRPr lang="en-US" sz="4000" dirty="0"/>
           </a:p>
           <a:p>
-            <a:pPr indent="0" marL="0">
+            <a:pPr marL="0" indent="0">
               <a:lnSpc>
                 <a:spcPts val="4600"/>
               </a:lnSpc>
@@ -2521,7 +2128,7 @@
           <a:bodyPr wrap="square" lIns="0" tIns="0" rIns="0" bIns="0" rtlCol="0" anchor="ctr"/>
           <a:lstStyle/>
           <a:p>
-            <a:pPr indent="0" marL="0">
+            <a:pPr marL="0" indent="0">
               <a:buNone/>
             </a:pPr>
             <a:r>
@@ -2580,7 +2187,7 @@
           <a:bodyPr wrap="square" lIns="0" tIns="0" rIns="0" bIns="0" rtlCol="0" anchor="ctr"/>
           <a:lstStyle/>
           <a:p>
-            <a:pPr indent="0" marL="0">
+            <a:pPr marL="0" indent="0">
               <a:buNone/>
             </a:pPr>
             <a:r>
@@ -2619,7 +2226,7 @@
           <a:bodyPr wrap="square" lIns="0" tIns="0" rIns="0" bIns="0" rtlCol="0" anchor="ctr"/>
           <a:lstStyle/>
           <a:p>
-            <a:pPr indent="0" marL="0">
+            <a:pPr marL="0" indent="0">
               <a:buNone/>
             </a:pPr>
             <a:r>
@@ -2658,7 +2265,7 @@
           <a:bodyPr wrap="square" lIns="0" tIns="0" rIns="0" bIns="0" rtlCol="0" anchor="ctr"/>
           <a:lstStyle/>
           <a:p>
-            <a:pPr indent="0" marL="0">
+            <a:pPr marL="0" indent="0">
               <a:buNone/>
             </a:pPr>
             <a:r>
@@ -2670,7 +2277,73 @@
                 <a:ea typeface="Calibri" pitchFamily="34" charset="-122"/>
                 <a:cs typeface="Calibri" pitchFamily="34" charset="-120"/>
               </a:rPr>
-              <a:t>Program Studi Ilmu Komputer — Program Pascasarjana</a:t>
+              <a:t>Program </a:t>
+            </a:r>
+            <a:r>
+              <a:rPr lang="en-US" sz="1250" dirty="0" err="1">
+                <a:solidFill>
+                  <a:srgbClr val="C7B8E0"/>
+                </a:solidFill>
+                <a:latin typeface="Calibri" pitchFamily="34" charset="0"/>
+                <a:ea typeface="Calibri" pitchFamily="34" charset="-122"/>
+                <a:cs typeface="Calibri" pitchFamily="34" charset="-120"/>
+              </a:rPr>
+              <a:t>Studi</a:t>
+            </a:r>
+            <a:r>
+              <a:rPr lang="en-US" sz="1250" dirty="0">
+                <a:solidFill>
+                  <a:srgbClr val="C7B8E0"/>
+                </a:solidFill>
+                <a:latin typeface="Calibri" pitchFamily="34" charset="0"/>
+                <a:ea typeface="Calibri" pitchFamily="34" charset="-122"/>
+                <a:cs typeface="Calibri" pitchFamily="34" charset="-120"/>
+              </a:rPr>
+              <a:t> </a:t>
+            </a:r>
+            <a:r>
+              <a:rPr lang="en-US" sz="1250" dirty="0" err="1">
+                <a:solidFill>
+                  <a:srgbClr val="C7B8E0"/>
+                </a:solidFill>
+                <a:latin typeface="Calibri" pitchFamily="34" charset="0"/>
+                <a:ea typeface="Calibri" pitchFamily="34" charset="-122"/>
+                <a:cs typeface="Calibri" pitchFamily="34" charset="-120"/>
+              </a:rPr>
+              <a:t>Kecerdasan</a:t>
+            </a:r>
+            <a:r>
+              <a:rPr lang="en-US" sz="1250" dirty="0">
+                <a:solidFill>
+                  <a:srgbClr val="C7B8E0"/>
+                </a:solidFill>
+                <a:latin typeface="Calibri" pitchFamily="34" charset="0"/>
+                <a:ea typeface="Calibri" pitchFamily="34" charset="-122"/>
+                <a:cs typeface="Calibri" pitchFamily="34" charset="-120"/>
+              </a:rPr>
+              <a:t> </a:t>
+            </a:r>
+            <a:r>
+              <a:rPr lang="en-US" sz="1250" dirty="0" err="1">
+                <a:solidFill>
+                  <a:srgbClr val="C7B8E0"/>
+                </a:solidFill>
+                <a:latin typeface="Calibri" pitchFamily="34" charset="0"/>
+                <a:ea typeface="Calibri" pitchFamily="34" charset="-122"/>
+                <a:cs typeface="Calibri" pitchFamily="34" charset="-120"/>
+              </a:rPr>
+              <a:t>Artifisial</a:t>
+            </a:r>
+            <a:r>
+              <a:rPr lang="en-US" sz="1250" dirty="0">
+                <a:solidFill>
+                  <a:srgbClr val="C7B8E0"/>
+                </a:solidFill>
+                <a:latin typeface="Calibri" pitchFamily="34" charset="0"/>
+                <a:ea typeface="Calibri" pitchFamily="34" charset="-122"/>
+                <a:cs typeface="Calibri" pitchFamily="34" charset="-120"/>
+              </a:rPr>
+              <a:t> — Program Pascasarjana</a:t>
             </a:r>
             <a:endParaRPr lang="en-US" sz="1250" dirty="0"/>
           </a:p>
@@ -2692,6 +2365,7 @@
         <a:solidFill>
           <a:srgbClr val="FFFFFF"/>
         </a:solidFill>
+        <a:effectLst/>
       </p:bgPr>
     </p:bg>
     <p:spTree>
@@ -2729,7 +2403,7 @@
           <a:bodyPr wrap="square" lIns="0" tIns="0" rIns="0" bIns="0" rtlCol="0" anchor="ctr"/>
           <a:lstStyle/>
           <a:p>
-            <a:pPr indent="0" marL="0">
+            <a:pPr marL="0" indent="0">
               <a:buNone/>
             </a:pPr>
             <a:r>
@@ -2768,7 +2442,7 @@
           <a:bodyPr wrap="square" lIns="0" tIns="0" rIns="0" bIns="0" rtlCol="0" anchor="ctr"/>
           <a:lstStyle/>
           <a:p>
-            <a:pPr indent="0" marL="0">
+            <a:pPr marL="0" indent="0">
               <a:buNone/>
             </a:pPr>
             <a:r>
@@ -2829,7 +2503,7 @@
           <a:bodyPr wrap="square" lIns="0" tIns="0" rIns="0" bIns="0" rtlCol="0" anchor="ctr"/>
           <a:lstStyle/>
           <a:p>
-            <a:pPr algn="ctr" indent="0" marL="0">
+            <a:pPr marL="0" indent="0" algn="ctr">
               <a:buNone/>
             </a:pPr>
             <a:r>
@@ -2849,7 +2523,7 @@
       </p:sp>
       <p:graphicFrame>
         <p:nvGraphicFramePr>
-          <p:cNvPr id="6" name="Chart 0" descr=""/>
+          <p:cNvPr id="6" name="Chart 0"/>
           <p:cNvGraphicFramePr/>
           <p:nvPr/>
         </p:nvGraphicFramePr>
@@ -2857,9 +2531,9 @@
           <a:off x="594360" y="1371600"/>
           <a:ext cx="7680960" cy="3931920"/>
         </p:xfrm>
-        <a:graphic xmlns:a="http://schemas.openxmlformats.org/drawingml/2006/main">
+        <a:graphic>
           <a:graphicData uri="http://schemas.openxmlformats.org/drawingml/2006/chart">
-            <c:chart xmlns:c="http://schemas.openxmlformats.org/drawingml/2006/chart" r:id="rId1"/>
+            <c:chart xmlns:c="http://schemas.openxmlformats.org/drawingml/2006/chart" xmlns:r="http://schemas.openxmlformats.org/officeDocument/2006/relationships" r:id="rId3"/>
           </a:graphicData>
         </a:graphic>
       </p:graphicFrame>
@@ -2911,7 +2585,7 @@
           <a:bodyPr wrap="square" lIns="0" tIns="0" rIns="0" bIns="0" rtlCol="0" anchor="ctr"/>
           <a:lstStyle/>
           <a:p>
-            <a:pPr indent="0" marL="0">
+            <a:pPr marL="0" indent="0">
               <a:buNone/>
             </a:pPr>
             <a:r>
@@ -2950,7 +2624,7 @@
           <a:bodyPr wrap="square" lIns="0" tIns="0" rIns="0" bIns="0" rtlCol="0" anchor="ctr"/>
           <a:lstStyle/>
           <a:p>
-            <a:pPr indent="0" marL="0">
+            <a:pPr marL="0" indent="0">
               <a:lnSpc>
                 <a:spcPts val="1600"/>
               </a:lnSpc>
@@ -2970,7 +2644,7 @@
             <a:endParaRPr lang="en-US" sz="1150" dirty="0"/>
           </a:p>
           <a:p>
-            <a:pPr indent="0" marL="0">
+            <a:pPr marL="0" indent="0">
               <a:lnSpc>
                 <a:spcPts val="1600"/>
               </a:lnSpc>
@@ -2979,7 +2653,7 @@
             <a:endParaRPr lang="en-US" sz="1150" dirty="0"/>
           </a:p>
           <a:p>
-            <a:pPr indent="0" marL="0">
+            <a:pPr marL="0" indent="0">
               <a:lnSpc>
                 <a:spcPts val="1600"/>
               </a:lnSpc>
@@ -2999,7 +2673,7 @@
             <a:endParaRPr lang="en-US" sz="1150" dirty="0"/>
           </a:p>
           <a:p>
-            <a:pPr indent="0" marL="0">
+            <a:pPr marL="0" indent="0">
               <a:lnSpc>
                 <a:spcPts val="1600"/>
               </a:lnSpc>
@@ -3008,7 +2682,7 @@
             <a:endParaRPr lang="en-US" sz="1150" dirty="0"/>
           </a:p>
           <a:p>
-            <a:pPr indent="0" marL="0">
+            <a:pPr marL="0" indent="0">
               <a:lnSpc>
                 <a:spcPts val="1600"/>
               </a:lnSpc>
@@ -3031,7 +2705,7 @@
       </p:sp>
       <p:graphicFrame>
         <p:nvGraphicFramePr>
-          <p:cNvPr id="3" name="Table 0"/>
+          <p:cNvPr id="10" name="Table 0"/>
           <p:cNvGraphicFramePr>
             <a:graphicFrameLocks noGrp="1"/>
           </p:cNvGraphicFramePr>
@@ -3045,19 +2719,55 @@
         </p:nvGraphicFramePr>
         <p:xfrm>
           <a:off x="594360" y="5486400"/>
-          <a:ext cx="10881360" cy="914400"/>
+          <a:ext cx="10881360" cy="932688"/>
         </p:xfrm>
         <a:graphic>
           <a:graphicData uri="http://schemas.openxmlformats.org/drawingml/2006/table">
             <a:tbl>
               <a:tblPr/>
               <a:tblGrid>
-                <a:gridCol w="2103120"/>
-                <a:gridCol w="1755648"/>
-                <a:gridCol w="1755648"/>
-                <a:gridCol w="1755648"/>
-                <a:gridCol w="1755648"/>
-                <a:gridCol w="1755648"/>
+                <a:gridCol w="2103120">
+                  <a:extLst>
+                    <a:ext uri="{9D8B030D-6E8A-4147-A177-3AD203B41FA5}">
+                      <a16:colId xmlns:a16="http://schemas.microsoft.com/office/drawing/2014/main" val="20000"/>
+                    </a:ext>
+                  </a:extLst>
+                </a:gridCol>
+                <a:gridCol w="1755648">
+                  <a:extLst>
+                    <a:ext uri="{9D8B030D-6E8A-4147-A177-3AD203B41FA5}">
+                      <a16:colId xmlns:a16="http://schemas.microsoft.com/office/drawing/2014/main" val="20001"/>
+                    </a:ext>
+                  </a:extLst>
+                </a:gridCol>
+                <a:gridCol w="1755648">
+                  <a:extLst>
+                    <a:ext uri="{9D8B030D-6E8A-4147-A177-3AD203B41FA5}">
+                      <a16:colId xmlns:a16="http://schemas.microsoft.com/office/drawing/2014/main" val="20002"/>
+                    </a:ext>
+                  </a:extLst>
+                </a:gridCol>
+                <a:gridCol w="1755648">
+                  <a:extLst>
+                    <a:ext uri="{9D8B030D-6E8A-4147-A177-3AD203B41FA5}">
+                      <a16:colId xmlns:a16="http://schemas.microsoft.com/office/drawing/2014/main" val="20003"/>
+                    </a:ext>
+                  </a:extLst>
+                </a:gridCol>
+                <a:gridCol w="1755648">
+                  <a:extLst>
+                    <a:ext uri="{9D8B030D-6E8A-4147-A177-3AD203B41FA5}">
+                      <a16:colId xmlns:a16="http://schemas.microsoft.com/office/drawing/2014/main" val="20004"/>
+                    </a:ext>
+                  </a:extLst>
+                </a:gridCol>
+                <a:gridCol w="1755648">
+                  <a:extLst>
+                    <a:ext uri="{9D8B030D-6E8A-4147-A177-3AD203B41FA5}">
+                      <a16:colId xmlns:a16="http://schemas.microsoft.com/office/drawing/2014/main" val="20005"/>
+                    </a:ext>
+                  </a:extLst>
+                </a:gridCol>
               </a:tblGrid>
               <a:tr h="310896">
                 <a:tc>
@@ -3065,7 +2775,7 @@
                     <a:bodyPr/>
                     <a:lstStyle/>
                     <a:p>
-                      <a:pPr algn="ctr" indent="0" marL="0">
+                      <a:pPr marL="0" indent="0" algn="ctr">
                         <a:buNone/>
                       </a:pPr>
                       <a:r>
@@ -3086,7 +2796,7 @@
                       </a:endParaRPr>
                     </a:p>
                   </a:txBody>
-                  <a:tcPr marL="91440" marR="91440" marT="45720" marB="45720" anchor="ctr">
+                  <a:tcPr anchor="ctr">
                     <a:lnL w="12700" cap="flat" cmpd="sng" algn="ctr">
                       <a:solidFill>
                         <a:srgbClr val="C7B8E0"/>
@@ -3133,7 +2843,7 @@
                     <a:bodyPr/>
                     <a:lstStyle/>
                     <a:p>
-                      <a:pPr algn="ctr" indent="0" marL="0">
+                      <a:pPr marL="0" indent="0" algn="ctr">
                         <a:buNone/>
                       </a:pPr>
                       <a:r>
@@ -3154,7 +2864,7 @@
                       </a:endParaRPr>
                     </a:p>
                   </a:txBody>
-                  <a:tcPr marL="91440" marR="91440" marT="45720" marB="45720" anchor="ctr">
+                  <a:tcPr anchor="ctr">
                     <a:lnL w="12700" cap="flat" cmpd="sng" algn="ctr">
                       <a:solidFill>
                         <a:srgbClr val="C7B8E0"/>
@@ -3201,7 +2911,7 @@
                     <a:bodyPr/>
                     <a:lstStyle/>
                     <a:p>
-                      <a:pPr algn="ctr" indent="0" marL="0">
+                      <a:pPr marL="0" indent="0" algn="ctr">
                         <a:buNone/>
                       </a:pPr>
                       <a:r>
@@ -3222,7 +2932,7 @@
                       </a:endParaRPr>
                     </a:p>
                   </a:txBody>
-                  <a:tcPr marL="91440" marR="91440" marT="45720" marB="45720" anchor="ctr">
+                  <a:tcPr anchor="ctr">
                     <a:lnL w="12700" cap="flat" cmpd="sng" algn="ctr">
                       <a:solidFill>
                         <a:srgbClr val="C7B8E0"/>
@@ -3269,7 +2979,7 @@
                     <a:bodyPr/>
                     <a:lstStyle/>
                     <a:p>
-                      <a:pPr algn="ctr" indent="0" marL="0">
+                      <a:pPr marL="0" indent="0" algn="ctr">
                         <a:buNone/>
                       </a:pPr>
                       <a:r>
@@ -3290,7 +3000,7 @@
                       </a:endParaRPr>
                     </a:p>
                   </a:txBody>
-                  <a:tcPr marL="91440" marR="91440" marT="45720" marB="45720" anchor="ctr">
+                  <a:tcPr anchor="ctr">
                     <a:lnL w="12700" cap="flat" cmpd="sng" algn="ctr">
                       <a:solidFill>
                         <a:srgbClr val="C7B8E0"/>
@@ -3337,7 +3047,7 @@
                     <a:bodyPr/>
                     <a:lstStyle/>
                     <a:p>
-                      <a:pPr algn="ctr" indent="0" marL="0">
+                      <a:pPr marL="0" indent="0" algn="ctr">
                         <a:buNone/>
                       </a:pPr>
                       <a:r>
@@ -3358,7 +3068,7 @@
                       </a:endParaRPr>
                     </a:p>
                   </a:txBody>
-                  <a:tcPr marL="91440" marR="91440" marT="45720" marB="45720" anchor="ctr">
+                  <a:tcPr anchor="ctr">
                     <a:lnL w="12700" cap="flat" cmpd="sng" algn="ctr">
                       <a:solidFill>
                         <a:srgbClr val="C7B8E0"/>
@@ -3405,7 +3115,7 @@
                     <a:bodyPr/>
                     <a:lstStyle/>
                     <a:p>
-                      <a:pPr algn="ctr" indent="0" marL="0">
+                      <a:pPr marL="0" indent="0" algn="ctr">
                         <a:buNone/>
                       </a:pPr>
                       <a:r>
@@ -3426,7 +3136,7 @@
                       </a:endParaRPr>
                     </a:p>
                   </a:txBody>
-                  <a:tcPr marL="91440" marR="91440" marT="45720" marB="45720" anchor="ctr">
+                  <a:tcPr anchor="ctr">
                     <a:lnL w="12700" cap="flat" cmpd="sng" algn="ctr">
                       <a:solidFill>
                         <a:srgbClr val="C7B8E0"/>
@@ -3468,6 +3178,11 @@
                     </a:solidFill>
                   </a:tcPr>
                 </a:tc>
+                <a:extLst>
+                  <a:ext uri="{0D108BD9-81ED-4DB2-BD59-A6C34878D82A}">
+                    <a16:rowId xmlns:a16="http://schemas.microsoft.com/office/drawing/2014/main" val="10000"/>
+                  </a:ext>
+                </a:extLst>
               </a:tr>
               <a:tr h="310896">
                 <a:tc>
@@ -3475,7 +3190,7 @@
                     <a:bodyPr/>
                     <a:lstStyle/>
                     <a:p>
-                      <a:pPr algn="ctr" indent="0" marL="0">
+                      <a:pPr marL="0" indent="0" algn="ctr">
                         <a:buNone/>
                       </a:pPr>
                       <a:r>
@@ -3496,7 +3211,7 @@
                       </a:endParaRPr>
                     </a:p>
                   </a:txBody>
-                  <a:tcPr marL="91440" marR="91440" marT="45720" marB="45720" anchor="ctr">
+                  <a:tcPr anchor="ctr">
                     <a:lnL w="12700" cap="flat" cmpd="sng" algn="ctr">
                       <a:solidFill>
                         <a:srgbClr val="C7B8E0"/>
@@ -3543,7 +3258,7 @@
                     <a:bodyPr/>
                     <a:lstStyle/>
                     <a:p>
-                      <a:pPr algn="ctr" indent="0" marL="0">
+                      <a:pPr marL="0" indent="0" algn="ctr">
                         <a:buNone/>
                       </a:pPr>
                       <a:r>
@@ -3564,7 +3279,7 @@
                       </a:endParaRPr>
                     </a:p>
                   </a:txBody>
-                  <a:tcPr marL="91440" marR="91440" marT="45720" marB="45720" anchor="ctr">
+                  <a:tcPr anchor="ctr">
                     <a:lnL w="12700" cap="flat" cmpd="sng" algn="ctr">
                       <a:solidFill>
                         <a:srgbClr val="C7B8E0"/>
@@ -3611,7 +3326,7 @@
                     <a:bodyPr/>
                     <a:lstStyle/>
                     <a:p>
-                      <a:pPr algn="ctr" indent="0" marL="0">
+                      <a:pPr marL="0" indent="0" algn="ctr">
                         <a:buNone/>
                       </a:pPr>
                       <a:r>
@@ -3632,7 +3347,7 @@
                       </a:endParaRPr>
                     </a:p>
                   </a:txBody>
-                  <a:tcPr marL="91440" marR="91440" marT="45720" marB="45720" anchor="ctr">
+                  <a:tcPr anchor="ctr">
                     <a:lnL w="12700" cap="flat" cmpd="sng" algn="ctr">
                       <a:solidFill>
                         <a:srgbClr val="C7B8E0"/>
@@ -3679,7 +3394,7 @@
                     <a:bodyPr/>
                     <a:lstStyle/>
                     <a:p>
-                      <a:pPr algn="ctr" indent="0" marL="0">
+                      <a:pPr marL="0" indent="0" algn="ctr">
                         <a:buNone/>
                       </a:pPr>
                       <a:r>
@@ -3700,7 +3415,7 @@
                       </a:endParaRPr>
                     </a:p>
                   </a:txBody>
-                  <a:tcPr marL="91440" marR="91440" marT="45720" marB="45720" anchor="ctr">
+                  <a:tcPr anchor="ctr">
                     <a:lnL w="12700" cap="flat" cmpd="sng" algn="ctr">
                       <a:solidFill>
                         <a:srgbClr val="C7B8E0"/>
@@ -3747,7 +3462,7 @@
                     <a:bodyPr/>
                     <a:lstStyle/>
                     <a:p>
-                      <a:pPr algn="ctr" indent="0" marL="0">
+                      <a:pPr marL="0" indent="0" algn="ctr">
                         <a:buNone/>
                       </a:pPr>
                       <a:r>
@@ -3768,7 +3483,7 @@
                       </a:endParaRPr>
                     </a:p>
                   </a:txBody>
-                  <a:tcPr marL="91440" marR="91440" marT="45720" marB="45720" anchor="ctr">
+                  <a:tcPr anchor="ctr">
                     <a:lnL w="12700" cap="flat" cmpd="sng" algn="ctr">
                       <a:solidFill>
                         <a:srgbClr val="C7B8E0"/>
@@ -3815,7 +3530,7 @@
                     <a:bodyPr/>
                     <a:lstStyle/>
                     <a:p>
-                      <a:pPr algn="ctr" indent="0" marL="0">
+                      <a:pPr marL="0" indent="0" algn="ctr">
                         <a:buNone/>
                       </a:pPr>
                       <a:r>
@@ -3836,7 +3551,7 @@
                       </a:endParaRPr>
                     </a:p>
                   </a:txBody>
-                  <a:tcPr marL="91440" marR="91440" marT="45720" marB="45720" anchor="ctr">
+                  <a:tcPr anchor="ctr">
                     <a:lnL w="12700" cap="flat" cmpd="sng" algn="ctr">
                       <a:solidFill>
                         <a:srgbClr val="C7B8E0"/>
@@ -3878,6 +3593,11 @@
                     </a:solidFill>
                   </a:tcPr>
                 </a:tc>
+                <a:extLst>
+                  <a:ext uri="{0D108BD9-81ED-4DB2-BD59-A6C34878D82A}">
+                    <a16:rowId xmlns:a16="http://schemas.microsoft.com/office/drawing/2014/main" val="10001"/>
+                  </a:ext>
+                </a:extLst>
               </a:tr>
               <a:tr h="310896">
                 <a:tc>
@@ -3885,7 +3605,7 @@
                     <a:bodyPr/>
                     <a:lstStyle/>
                     <a:p>
-                      <a:pPr algn="ctr" indent="0" marL="0">
+                      <a:pPr marL="0" indent="0" algn="ctr">
                         <a:buNone/>
                       </a:pPr>
                       <a:r>
@@ -3906,7 +3626,7 @@
                       </a:endParaRPr>
                     </a:p>
                   </a:txBody>
-                  <a:tcPr marL="91440" marR="91440" marT="45720" marB="45720" anchor="ctr">
+                  <a:tcPr anchor="ctr">
                     <a:lnL w="12700" cap="flat" cmpd="sng" algn="ctr">
                       <a:solidFill>
                         <a:srgbClr val="C7B8E0"/>
@@ -3953,7 +3673,7 @@
                     <a:bodyPr/>
                     <a:lstStyle/>
                     <a:p>
-                      <a:pPr algn="ctr" indent="0" marL="0">
+                      <a:pPr marL="0" indent="0" algn="ctr">
                         <a:buNone/>
                       </a:pPr>
                       <a:r>
@@ -3974,7 +3694,7 @@
                       </a:endParaRPr>
                     </a:p>
                   </a:txBody>
-                  <a:tcPr marL="91440" marR="91440" marT="45720" marB="45720" anchor="ctr">
+                  <a:tcPr anchor="ctr">
                     <a:lnL w="12700" cap="flat" cmpd="sng" algn="ctr">
                       <a:solidFill>
                         <a:srgbClr val="C7B8E0"/>
@@ -4021,7 +3741,7 @@
                     <a:bodyPr/>
                     <a:lstStyle/>
                     <a:p>
-                      <a:pPr algn="ctr" indent="0" marL="0">
+                      <a:pPr marL="0" indent="0" algn="ctr">
                         <a:buNone/>
                       </a:pPr>
                       <a:r>
@@ -4042,7 +3762,7 @@
                       </a:endParaRPr>
                     </a:p>
                   </a:txBody>
-                  <a:tcPr marL="91440" marR="91440" marT="45720" marB="45720" anchor="ctr">
+                  <a:tcPr anchor="ctr">
                     <a:lnL w="12700" cap="flat" cmpd="sng" algn="ctr">
                       <a:solidFill>
                         <a:srgbClr val="C7B8E0"/>
@@ -4089,7 +3809,7 @@
                     <a:bodyPr/>
                     <a:lstStyle/>
                     <a:p>
-                      <a:pPr algn="ctr" indent="0" marL="0">
+                      <a:pPr marL="0" indent="0" algn="ctr">
                         <a:buNone/>
                       </a:pPr>
                       <a:r>
@@ -4110,7 +3830,7 @@
                       </a:endParaRPr>
                     </a:p>
                   </a:txBody>
-                  <a:tcPr marL="91440" marR="91440" marT="45720" marB="45720" anchor="ctr">
+                  <a:tcPr anchor="ctr">
                     <a:lnL w="12700" cap="flat" cmpd="sng" algn="ctr">
                       <a:solidFill>
                         <a:srgbClr val="C7B8E0"/>
@@ -4157,7 +3877,7 @@
                     <a:bodyPr/>
                     <a:lstStyle/>
                     <a:p>
-                      <a:pPr algn="ctr" indent="0" marL="0">
+                      <a:pPr marL="0" indent="0" algn="ctr">
                         <a:buNone/>
                       </a:pPr>
                       <a:r>
@@ -4178,7 +3898,7 @@
                       </a:endParaRPr>
                     </a:p>
                   </a:txBody>
-                  <a:tcPr marL="91440" marR="91440" marT="45720" marB="45720" anchor="ctr">
+                  <a:tcPr anchor="ctr">
                     <a:lnL w="12700" cap="flat" cmpd="sng" algn="ctr">
                       <a:solidFill>
                         <a:srgbClr val="C7B8E0"/>
@@ -4225,7 +3945,7 @@
                     <a:bodyPr/>
                     <a:lstStyle/>
                     <a:p>
-                      <a:pPr algn="ctr" indent="0" marL="0">
+                      <a:pPr marL="0" indent="0" algn="ctr">
                         <a:buNone/>
                       </a:pPr>
                       <a:r>
@@ -4246,7 +3966,7 @@
                       </a:endParaRPr>
                     </a:p>
                   </a:txBody>
-                  <a:tcPr marL="91440" marR="91440" marT="45720" marB="45720" anchor="ctr">
+                  <a:tcPr anchor="ctr">
                     <a:lnL w="12700" cap="flat" cmpd="sng" algn="ctr">
                       <a:solidFill>
                         <a:srgbClr val="C7B8E0"/>
@@ -4288,6 +4008,11 @@
                     </a:solidFill>
                   </a:tcPr>
                 </a:tc>
+                <a:extLst>
+                  <a:ext uri="{0D108BD9-81ED-4DB2-BD59-A6C34878D82A}">
+                    <a16:rowId xmlns:a16="http://schemas.microsoft.com/office/drawing/2014/main" val="10002"/>
+                  </a:ext>
+                </a:extLst>
               </a:tr>
             </a:tbl>
           </a:graphicData>
@@ -4309,6 +4034,7 @@
         <a:solidFill>
           <a:srgbClr val="FFFFFF"/>
         </a:solidFill>
+        <a:effectLst/>
       </p:bgPr>
     </p:bg>
     <p:spTree>
@@ -4346,7 +4072,7 @@
           <a:bodyPr wrap="square" lIns="0" tIns="0" rIns="0" bIns="0" rtlCol="0" anchor="ctr"/>
           <a:lstStyle/>
           <a:p>
-            <a:pPr indent="0" marL="0">
+            <a:pPr marL="0" indent="0">
               <a:buNone/>
             </a:pPr>
             <a:r>
@@ -4385,7 +4111,7 @@
           <a:bodyPr wrap="square" lIns="0" tIns="0" rIns="0" bIns="0" rtlCol="0" anchor="ctr"/>
           <a:lstStyle/>
           <a:p>
-            <a:pPr indent="0" marL="0">
+            <a:pPr marL="0" indent="0">
               <a:buNone/>
             </a:pPr>
             <a:r>
@@ -4446,7 +4172,7 @@
           <a:bodyPr wrap="square" lIns="0" tIns="0" rIns="0" bIns="0" rtlCol="0" anchor="ctr"/>
           <a:lstStyle/>
           <a:p>
-            <a:pPr algn="ctr" indent="0" marL="0">
+            <a:pPr marL="0" indent="0" algn="ctr">
               <a:buNone/>
             </a:pPr>
             <a:r>
@@ -4466,14 +4192,14 @@
       </p:sp>
       <p:pic>
         <p:nvPicPr>
-          <p:cNvPr id="6" name="Image 0" descr="preencoded.png">    </p:cNvPr>
+          <p:cNvPr id="6" name="Image 0" descr="preencoded.png"/>
           <p:cNvPicPr>
             <a:picLocks noChangeAspect="1"/>
           </p:cNvPicPr>
           <p:nvPr/>
         </p:nvPicPr>
         <p:blipFill>
-          <a:blip r:embed="rId1"/>
+          <a:blip r:embed="rId3"/>
           <a:stretch>
             <a:fillRect/>
           </a:stretch>
@@ -4531,7 +4257,7 @@
           <a:bodyPr wrap="square" lIns="0" tIns="0" rIns="0" bIns="0" rtlCol="0" anchor="ctr"/>
           <a:lstStyle/>
           <a:p>
-            <a:pPr indent="0" marL="0">
+            <a:pPr marL="0" indent="0">
               <a:buNone/>
             </a:pPr>
             <a:r>
@@ -4570,7 +4296,7 @@
           <a:bodyPr wrap="square" lIns="0" tIns="0" rIns="0" bIns="0" rtlCol="0" anchor="ctr"/>
           <a:lstStyle/>
           <a:p>
-            <a:pPr indent="0" marL="0">
+            <a:pPr marL="0" indent="0">
               <a:lnSpc>
                 <a:spcPts val="1600"/>
               </a:lnSpc>
@@ -4590,7 +4316,7 @@
             <a:endParaRPr lang="en-US" sz="1150" dirty="0"/>
           </a:p>
           <a:p>
-            <a:pPr indent="0" marL="0">
+            <a:pPr marL="0" indent="0">
               <a:lnSpc>
                 <a:spcPts val="1600"/>
               </a:lnSpc>
@@ -4599,7 +4325,7 @@
             <a:endParaRPr lang="en-US" sz="1150" dirty="0"/>
           </a:p>
           <a:p>
-            <a:pPr indent="0" marL="0">
+            <a:pPr marL="0" indent="0">
               <a:lnSpc>
                 <a:spcPts val="1600"/>
               </a:lnSpc>
@@ -4619,7 +4345,7 @@
             <a:endParaRPr lang="en-US" sz="1150" dirty="0"/>
           </a:p>
           <a:p>
-            <a:pPr indent="0" marL="0">
+            <a:pPr marL="0" indent="0">
               <a:lnSpc>
                 <a:spcPts val="1600"/>
               </a:lnSpc>
@@ -4628,7 +4354,7 @@
             <a:endParaRPr lang="en-US" sz="1150" dirty="0"/>
           </a:p>
           <a:p>
-            <a:pPr indent="0" marL="0">
+            <a:pPr marL="0" indent="0">
               <a:lnSpc>
                 <a:spcPts val="1600"/>
               </a:lnSpc>
@@ -4648,7 +4374,7 @@
             <a:endParaRPr lang="en-US" sz="1150" dirty="0"/>
           </a:p>
           <a:p>
-            <a:pPr indent="0" marL="0">
+            <a:pPr marL="0" indent="0">
               <a:lnSpc>
                 <a:spcPts val="1600"/>
               </a:lnSpc>
@@ -4671,7 +4397,7 @@
       </p:sp>
       <p:graphicFrame>
         <p:nvGraphicFramePr>
-          <p:cNvPr id="4" name="Table 0"/>
+          <p:cNvPr id="10" name="Table 0"/>
           <p:cNvGraphicFramePr>
             <a:graphicFrameLocks noGrp="1"/>
           </p:cNvGraphicFramePr>
@@ -4685,19 +4411,55 @@
         </p:nvGraphicFramePr>
         <p:xfrm>
           <a:off x="594360" y="5486400"/>
-          <a:ext cx="10881360" cy="914400"/>
+          <a:ext cx="10881360" cy="932688"/>
         </p:xfrm>
         <a:graphic>
           <a:graphicData uri="http://schemas.openxmlformats.org/drawingml/2006/table">
             <a:tbl>
               <a:tblPr/>
               <a:tblGrid>
-                <a:gridCol w="2103120"/>
-                <a:gridCol w="1755648"/>
-                <a:gridCol w="1755648"/>
-                <a:gridCol w="1755648"/>
-                <a:gridCol w="1755648"/>
-                <a:gridCol w="1755648"/>
+                <a:gridCol w="2103120">
+                  <a:extLst>
+                    <a:ext uri="{9D8B030D-6E8A-4147-A177-3AD203B41FA5}">
+                      <a16:colId xmlns:a16="http://schemas.microsoft.com/office/drawing/2014/main" val="20000"/>
+                    </a:ext>
+                  </a:extLst>
+                </a:gridCol>
+                <a:gridCol w="1755648">
+                  <a:extLst>
+                    <a:ext uri="{9D8B030D-6E8A-4147-A177-3AD203B41FA5}">
+                      <a16:colId xmlns:a16="http://schemas.microsoft.com/office/drawing/2014/main" val="20001"/>
+                    </a:ext>
+                  </a:extLst>
+                </a:gridCol>
+                <a:gridCol w="1755648">
+                  <a:extLst>
+                    <a:ext uri="{9D8B030D-6E8A-4147-A177-3AD203B41FA5}">
+                      <a16:colId xmlns:a16="http://schemas.microsoft.com/office/drawing/2014/main" val="20002"/>
+                    </a:ext>
+                  </a:extLst>
+                </a:gridCol>
+                <a:gridCol w="1755648">
+                  <a:extLst>
+                    <a:ext uri="{9D8B030D-6E8A-4147-A177-3AD203B41FA5}">
+                      <a16:colId xmlns:a16="http://schemas.microsoft.com/office/drawing/2014/main" val="20003"/>
+                    </a:ext>
+                  </a:extLst>
+                </a:gridCol>
+                <a:gridCol w="1755648">
+                  <a:extLst>
+                    <a:ext uri="{9D8B030D-6E8A-4147-A177-3AD203B41FA5}">
+                      <a16:colId xmlns:a16="http://schemas.microsoft.com/office/drawing/2014/main" val="20004"/>
+                    </a:ext>
+                  </a:extLst>
+                </a:gridCol>
+                <a:gridCol w="1755648">
+                  <a:extLst>
+                    <a:ext uri="{9D8B030D-6E8A-4147-A177-3AD203B41FA5}">
+                      <a16:colId xmlns:a16="http://schemas.microsoft.com/office/drawing/2014/main" val="20005"/>
+                    </a:ext>
+                  </a:extLst>
+                </a:gridCol>
               </a:tblGrid>
               <a:tr h="310896">
                 <a:tc>
@@ -4705,7 +4467,7 @@
                     <a:bodyPr/>
                     <a:lstStyle/>
                     <a:p>
-                      <a:pPr algn="ctr" indent="0" marL="0">
+                      <a:pPr marL="0" indent="0" algn="ctr">
                         <a:buNone/>
                       </a:pPr>
                       <a:r>
@@ -4726,7 +4488,7 @@
                       </a:endParaRPr>
                     </a:p>
                   </a:txBody>
-                  <a:tcPr marL="91440" marR="91440" marT="45720" marB="45720" anchor="ctr">
+                  <a:tcPr anchor="ctr">
                     <a:lnL w="12700" cap="flat" cmpd="sng" algn="ctr">
                       <a:solidFill>
                         <a:srgbClr val="C7B8E0"/>
@@ -4773,7 +4535,7 @@
                     <a:bodyPr/>
                     <a:lstStyle/>
                     <a:p>
-                      <a:pPr algn="ctr" indent="0" marL="0">
+                      <a:pPr marL="0" indent="0" algn="ctr">
                         <a:buNone/>
                       </a:pPr>
                       <a:r>
@@ -4794,7 +4556,7 @@
                       </a:endParaRPr>
                     </a:p>
                   </a:txBody>
-                  <a:tcPr marL="91440" marR="91440" marT="45720" marB="45720" anchor="ctr">
+                  <a:tcPr anchor="ctr">
                     <a:lnL w="12700" cap="flat" cmpd="sng" algn="ctr">
                       <a:solidFill>
                         <a:srgbClr val="C7B8E0"/>
@@ -4841,7 +4603,7 @@
                     <a:bodyPr/>
                     <a:lstStyle/>
                     <a:p>
-                      <a:pPr algn="ctr" indent="0" marL="0">
+                      <a:pPr marL="0" indent="0" algn="ctr">
                         <a:buNone/>
                       </a:pPr>
                       <a:r>
@@ -4862,7 +4624,7 @@
                       </a:endParaRPr>
                     </a:p>
                   </a:txBody>
-                  <a:tcPr marL="91440" marR="91440" marT="45720" marB="45720" anchor="ctr">
+                  <a:tcPr anchor="ctr">
                     <a:lnL w="12700" cap="flat" cmpd="sng" algn="ctr">
                       <a:solidFill>
                         <a:srgbClr val="C7B8E0"/>
@@ -4909,7 +4671,7 @@
                     <a:bodyPr/>
                     <a:lstStyle/>
                     <a:p>
-                      <a:pPr algn="ctr" indent="0" marL="0">
+                      <a:pPr marL="0" indent="0" algn="ctr">
                         <a:buNone/>
                       </a:pPr>
                       <a:r>
@@ -4930,7 +4692,7 @@
                       </a:endParaRPr>
                     </a:p>
                   </a:txBody>
-                  <a:tcPr marL="91440" marR="91440" marT="45720" marB="45720" anchor="ctr">
+                  <a:tcPr anchor="ctr">
                     <a:lnL w="12700" cap="flat" cmpd="sng" algn="ctr">
                       <a:solidFill>
                         <a:srgbClr val="C7B8E0"/>
@@ -4977,7 +4739,7 @@
                     <a:bodyPr/>
                     <a:lstStyle/>
                     <a:p>
-                      <a:pPr algn="ctr" indent="0" marL="0">
+                      <a:pPr marL="0" indent="0" algn="ctr">
                         <a:buNone/>
                       </a:pPr>
                       <a:r>
@@ -4998,7 +4760,7 @@
                       </a:endParaRPr>
                     </a:p>
                   </a:txBody>
-                  <a:tcPr marL="91440" marR="91440" marT="45720" marB="45720" anchor="ctr">
+                  <a:tcPr anchor="ctr">
                     <a:lnL w="12700" cap="flat" cmpd="sng" algn="ctr">
                       <a:solidFill>
                         <a:srgbClr val="C7B8E0"/>
@@ -5045,7 +4807,7 @@
                     <a:bodyPr/>
                     <a:lstStyle/>
                     <a:p>
-                      <a:pPr algn="ctr" indent="0" marL="0">
+                      <a:pPr marL="0" indent="0" algn="ctr">
                         <a:buNone/>
                       </a:pPr>
                       <a:r>
@@ -5066,7 +4828,7 @@
                       </a:endParaRPr>
                     </a:p>
                   </a:txBody>
-                  <a:tcPr marL="91440" marR="91440" marT="45720" marB="45720" anchor="ctr">
+                  <a:tcPr anchor="ctr">
                     <a:lnL w="12700" cap="flat" cmpd="sng" algn="ctr">
                       <a:solidFill>
                         <a:srgbClr val="C7B8E0"/>
@@ -5108,6 +4870,11 @@
                     </a:solidFill>
                   </a:tcPr>
                 </a:tc>
+                <a:extLst>
+                  <a:ext uri="{0D108BD9-81ED-4DB2-BD59-A6C34878D82A}">
+                    <a16:rowId xmlns:a16="http://schemas.microsoft.com/office/drawing/2014/main" val="10000"/>
+                  </a:ext>
+                </a:extLst>
               </a:tr>
               <a:tr h="310896">
                 <a:tc>
@@ -5115,7 +4882,7 @@
                     <a:bodyPr/>
                     <a:lstStyle/>
                     <a:p>
-                      <a:pPr algn="ctr" indent="0" marL="0">
+                      <a:pPr marL="0" indent="0" algn="ctr">
                         <a:buNone/>
                       </a:pPr>
                       <a:r>
@@ -5136,7 +4903,7 @@
                       </a:endParaRPr>
                     </a:p>
                   </a:txBody>
-                  <a:tcPr marL="91440" marR="91440" marT="45720" marB="45720" anchor="ctr">
+                  <a:tcPr anchor="ctr">
                     <a:lnL w="12700" cap="flat" cmpd="sng" algn="ctr">
                       <a:solidFill>
                         <a:srgbClr val="C7B8E0"/>
@@ -5183,7 +4950,7 @@
                     <a:bodyPr/>
                     <a:lstStyle/>
                     <a:p>
-                      <a:pPr algn="ctr" indent="0" marL="0">
+                      <a:pPr marL="0" indent="0" algn="ctr">
                         <a:buNone/>
                       </a:pPr>
                       <a:r>
@@ -5204,7 +4971,7 @@
                       </a:endParaRPr>
                     </a:p>
                   </a:txBody>
-                  <a:tcPr marL="91440" marR="91440" marT="45720" marB="45720" anchor="ctr">
+                  <a:tcPr anchor="ctr">
                     <a:lnL w="12700" cap="flat" cmpd="sng" algn="ctr">
                       <a:solidFill>
                         <a:srgbClr val="C7B8E0"/>
@@ -5251,7 +5018,7 @@
                     <a:bodyPr/>
                     <a:lstStyle/>
                     <a:p>
-                      <a:pPr algn="ctr" indent="0" marL="0">
+                      <a:pPr marL="0" indent="0" algn="ctr">
                         <a:buNone/>
                       </a:pPr>
                       <a:r>
@@ -5272,7 +5039,7 @@
                       </a:endParaRPr>
                     </a:p>
                   </a:txBody>
-                  <a:tcPr marL="91440" marR="91440" marT="45720" marB="45720" anchor="ctr">
+                  <a:tcPr anchor="ctr">
                     <a:lnL w="12700" cap="flat" cmpd="sng" algn="ctr">
                       <a:solidFill>
                         <a:srgbClr val="C7B8E0"/>
@@ -5319,7 +5086,7 @@
                     <a:bodyPr/>
                     <a:lstStyle/>
                     <a:p>
-                      <a:pPr algn="ctr" indent="0" marL="0">
+                      <a:pPr marL="0" indent="0" algn="ctr">
                         <a:buNone/>
                       </a:pPr>
                       <a:r>
@@ -5340,7 +5107,7 @@
                       </a:endParaRPr>
                     </a:p>
                   </a:txBody>
-                  <a:tcPr marL="91440" marR="91440" marT="45720" marB="45720" anchor="ctr">
+                  <a:tcPr anchor="ctr">
                     <a:lnL w="12700" cap="flat" cmpd="sng" algn="ctr">
                       <a:solidFill>
                         <a:srgbClr val="C7B8E0"/>
@@ -5387,7 +5154,7 @@
                     <a:bodyPr/>
                     <a:lstStyle/>
                     <a:p>
-                      <a:pPr algn="ctr" indent="0" marL="0">
+                      <a:pPr marL="0" indent="0" algn="ctr">
                         <a:buNone/>
                       </a:pPr>
                       <a:r>
@@ -5408,7 +5175,7 @@
                       </a:endParaRPr>
                     </a:p>
                   </a:txBody>
-                  <a:tcPr marL="91440" marR="91440" marT="45720" marB="45720" anchor="ctr">
+                  <a:tcPr anchor="ctr">
                     <a:lnL w="12700" cap="flat" cmpd="sng" algn="ctr">
                       <a:solidFill>
                         <a:srgbClr val="C7B8E0"/>
@@ -5455,7 +5222,7 @@
                     <a:bodyPr/>
                     <a:lstStyle/>
                     <a:p>
-                      <a:pPr algn="ctr" indent="0" marL="0">
+                      <a:pPr marL="0" indent="0" algn="ctr">
                         <a:buNone/>
                       </a:pPr>
                       <a:r>
@@ -5476,7 +5243,7 @@
                       </a:endParaRPr>
                     </a:p>
                   </a:txBody>
-                  <a:tcPr marL="91440" marR="91440" marT="45720" marB="45720" anchor="ctr">
+                  <a:tcPr anchor="ctr">
                     <a:lnL w="12700" cap="flat" cmpd="sng" algn="ctr">
                       <a:solidFill>
                         <a:srgbClr val="C7B8E0"/>
@@ -5518,6 +5285,11 @@
                     </a:solidFill>
                   </a:tcPr>
                 </a:tc>
+                <a:extLst>
+                  <a:ext uri="{0D108BD9-81ED-4DB2-BD59-A6C34878D82A}">
+                    <a16:rowId xmlns:a16="http://schemas.microsoft.com/office/drawing/2014/main" val="10001"/>
+                  </a:ext>
+                </a:extLst>
               </a:tr>
               <a:tr h="310896">
                 <a:tc>
@@ -5525,7 +5297,7 @@
                     <a:bodyPr/>
                     <a:lstStyle/>
                     <a:p>
-                      <a:pPr algn="ctr" indent="0" marL="0">
+                      <a:pPr marL="0" indent="0" algn="ctr">
                         <a:buNone/>
                       </a:pPr>
                       <a:r>
@@ -5546,7 +5318,7 @@
                       </a:endParaRPr>
                     </a:p>
                   </a:txBody>
-                  <a:tcPr marL="91440" marR="91440" marT="45720" marB="45720" anchor="ctr">
+                  <a:tcPr anchor="ctr">
                     <a:lnL w="12700" cap="flat" cmpd="sng" algn="ctr">
                       <a:solidFill>
                         <a:srgbClr val="C7B8E0"/>
@@ -5593,7 +5365,7 @@
                     <a:bodyPr/>
                     <a:lstStyle/>
                     <a:p>
-                      <a:pPr algn="ctr" indent="0" marL="0">
+                      <a:pPr marL="0" indent="0" algn="ctr">
                         <a:buNone/>
                       </a:pPr>
                       <a:r>
@@ -5614,7 +5386,7 @@
                       </a:endParaRPr>
                     </a:p>
                   </a:txBody>
-                  <a:tcPr marL="91440" marR="91440" marT="45720" marB="45720" anchor="ctr">
+                  <a:tcPr anchor="ctr">
                     <a:lnL w="12700" cap="flat" cmpd="sng" algn="ctr">
                       <a:solidFill>
                         <a:srgbClr val="C7B8E0"/>
@@ -5661,7 +5433,7 @@
                     <a:bodyPr/>
                     <a:lstStyle/>
                     <a:p>
-                      <a:pPr algn="ctr" indent="0" marL="0">
+                      <a:pPr marL="0" indent="0" algn="ctr">
                         <a:buNone/>
                       </a:pPr>
                       <a:r>
@@ -5682,7 +5454,7 @@
                       </a:endParaRPr>
                     </a:p>
                   </a:txBody>
-                  <a:tcPr marL="91440" marR="91440" marT="45720" marB="45720" anchor="ctr">
+                  <a:tcPr anchor="ctr">
                     <a:lnL w="12700" cap="flat" cmpd="sng" algn="ctr">
                       <a:solidFill>
                         <a:srgbClr val="C7B8E0"/>
@@ -5729,7 +5501,7 @@
                     <a:bodyPr/>
                     <a:lstStyle/>
                     <a:p>
-                      <a:pPr algn="ctr" indent="0" marL="0">
+                      <a:pPr marL="0" indent="0" algn="ctr">
                         <a:buNone/>
                       </a:pPr>
                       <a:r>
@@ -5750,7 +5522,7 @@
                       </a:endParaRPr>
                     </a:p>
                   </a:txBody>
-                  <a:tcPr marL="91440" marR="91440" marT="45720" marB="45720" anchor="ctr">
+                  <a:tcPr anchor="ctr">
                     <a:lnL w="12700" cap="flat" cmpd="sng" algn="ctr">
                       <a:solidFill>
                         <a:srgbClr val="C7B8E0"/>
@@ -5797,7 +5569,7 @@
                     <a:bodyPr/>
                     <a:lstStyle/>
                     <a:p>
-                      <a:pPr algn="ctr" indent="0" marL="0">
+                      <a:pPr marL="0" indent="0" algn="ctr">
                         <a:buNone/>
                       </a:pPr>
                       <a:r>
@@ -5818,7 +5590,7 @@
                       </a:endParaRPr>
                     </a:p>
                   </a:txBody>
-                  <a:tcPr marL="91440" marR="91440" marT="45720" marB="45720" anchor="ctr">
+                  <a:tcPr anchor="ctr">
                     <a:lnL w="12700" cap="flat" cmpd="sng" algn="ctr">
                       <a:solidFill>
                         <a:srgbClr val="C7B8E0"/>
@@ -5865,7 +5637,7 @@
                     <a:bodyPr/>
                     <a:lstStyle/>
                     <a:p>
-                      <a:pPr algn="ctr" indent="0" marL="0">
+                      <a:pPr marL="0" indent="0" algn="ctr">
                         <a:buNone/>
                       </a:pPr>
                       <a:r>
@@ -5886,7 +5658,7 @@
                       </a:endParaRPr>
                     </a:p>
                   </a:txBody>
-                  <a:tcPr marL="91440" marR="91440" marT="45720" marB="45720" anchor="ctr">
+                  <a:tcPr anchor="ctr">
                     <a:lnL w="12700" cap="flat" cmpd="sng" algn="ctr">
                       <a:solidFill>
                         <a:srgbClr val="C7B8E0"/>
@@ -5928,6 +5700,11 @@
                     </a:solidFill>
                   </a:tcPr>
                 </a:tc>
+                <a:extLst>
+                  <a:ext uri="{0D108BD9-81ED-4DB2-BD59-A6C34878D82A}">
+                    <a16:rowId xmlns:a16="http://schemas.microsoft.com/office/drawing/2014/main" val="10002"/>
+                  </a:ext>
+                </a:extLst>
               </a:tr>
             </a:tbl>
           </a:graphicData>
@@ -5949,6 +5726,7 @@
         <a:solidFill>
           <a:srgbClr val="FFFFFF"/>
         </a:solidFill>
+        <a:effectLst/>
       </p:bgPr>
     </p:bg>
     <p:spTree>
@@ -5986,7 +5764,7 @@
           <a:bodyPr wrap="square" lIns="0" tIns="0" rIns="0" bIns="0" rtlCol="0" anchor="ctr"/>
           <a:lstStyle/>
           <a:p>
-            <a:pPr indent="0" marL="0">
+            <a:pPr marL="0" indent="0">
               <a:buNone/>
             </a:pPr>
             <a:r>
@@ -6025,7 +5803,7 @@
           <a:bodyPr wrap="square" lIns="0" tIns="0" rIns="0" bIns="0" rtlCol="0" anchor="ctr"/>
           <a:lstStyle/>
           <a:p>
-            <a:pPr indent="0" marL="0">
+            <a:pPr marL="0" indent="0">
               <a:buNone/>
             </a:pPr>
             <a:r>
@@ -6086,7 +5864,7 @@
           <a:bodyPr wrap="square" lIns="0" tIns="0" rIns="0" bIns="0" rtlCol="0" anchor="ctr"/>
           <a:lstStyle/>
           <a:p>
-            <a:pPr algn="ctr" indent="0" marL="0">
+            <a:pPr marL="0" indent="0" algn="ctr">
               <a:buNone/>
             </a:pPr>
             <a:r>
@@ -6106,7 +5884,7 @@
       </p:sp>
       <p:graphicFrame>
         <p:nvGraphicFramePr>
-          <p:cNvPr id="6" name="Chart 0" descr=""/>
+          <p:cNvPr id="6" name="Chart 0"/>
           <p:cNvGraphicFramePr/>
           <p:nvPr/>
         </p:nvGraphicFramePr>
@@ -6114,9 +5892,9 @@
           <a:off x="594360" y="1371600"/>
           <a:ext cx="7680960" cy="3931920"/>
         </p:xfrm>
-        <a:graphic xmlns:a="http://schemas.openxmlformats.org/drawingml/2006/main">
+        <a:graphic>
           <a:graphicData uri="http://schemas.openxmlformats.org/drawingml/2006/chart">
-            <c:chart xmlns:c="http://schemas.openxmlformats.org/drawingml/2006/chart" r:id="rId1"/>
+            <c:chart xmlns:c="http://schemas.openxmlformats.org/drawingml/2006/chart" xmlns:r="http://schemas.openxmlformats.org/officeDocument/2006/relationships" r:id="rId3"/>
           </a:graphicData>
         </a:graphic>
       </p:graphicFrame>
@@ -6168,7 +5946,7 @@
           <a:bodyPr wrap="square" lIns="0" tIns="0" rIns="0" bIns="0" rtlCol="0" anchor="ctr"/>
           <a:lstStyle/>
           <a:p>
-            <a:pPr indent="0" marL="0">
+            <a:pPr marL="0" indent="0">
               <a:buNone/>
             </a:pPr>
             <a:r>
@@ -6207,7 +5985,7 @@
           <a:bodyPr wrap="square" lIns="0" tIns="0" rIns="0" bIns="0" rtlCol="0" anchor="ctr"/>
           <a:lstStyle/>
           <a:p>
-            <a:pPr indent="0" marL="0">
+            <a:pPr marL="0" indent="0">
               <a:lnSpc>
                 <a:spcPts val="1600"/>
               </a:lnSpc>
@@ -6227,7 +6005,7 @@
             <a:endParaRPr lang="en-US" sz="1150" dirty="0"/>
           </a:p>
           <a:p>
-            <a:pPr indent="0" marL="0">
+            <a:pPr marL="0" indent="0">
               <a:lnSpc>
                 <a:spcPts val="1600"/>
               </a:lnSpc>
@@ -6236,7 +6014,7 @@
             <a:endParaRPr lang="en-US" sz="1150" dirty="0"/>
           </a:p>
           <a:p>
-            <a:pPr indent="0" marL="0">
+            <a:pPr marL="0" indent="0">
               <a:lnSpc>
                 <a:spcPts val="1600"/>
               </a:lnSpc>
@@ -6256,7 +6034,7 @@
             <a:endParaRPr lang="en-US" sz="1150" dirty="0"/>
           </a:p>
           <a:p>
-            <a:pPr indent="0" marL="0">
+            <a:pPr marL="0" indent="0">
               <a:lnSpc>
                 <a:spcPts val="1600"/>
               </a:lnSpc>
@@ -6265,7 +6043,7 @@
             <a:endParaRPr lang="en-US" sz="1150" dirty="0"/>
           </a:p>
           <a:p>
-            <a:pPr indent="0" marL="0">
+            <a:pPr marL="0" indent="0">
               <a:lnSpc>
                 <a:spcPts val="1600"/>
               </a:lnSpc>
@@ -6288,7 +6066,7 @@
       </p:sp>
       <p:graphicFrame>
         <p:nvGraphicFramePr>
-          <p:cNvPr id="5" name="Table 0"/>
+          <p:cNvPr id="10" name="Table 0"/>
           <p:cNvGraphicFramePr>
             <a:graphicFrameLocks noGrp="1"/>
           </p:cNvGraphicFramePr>
@@ -6302,19 +6080,55 @@
         </p:nvGraphicFramePr>
         <p:xfrm>
           <a:off x="594360" y="5486400"/>
-          <a:ext cx="10881360" cy="914400"/>
+          <a:ext cx="10881360" cy="932688"/>
         </p:xfrm>
         <a:graphic>
           <a:graphicData uri="http://schemas.openxmlformats.org/drawingml/2006/table">
             <a:tbl>
               <a:tblPr/>
               <a:tblGrid>
-                <a:gridCol w="2103120"/>
-                <a:gridCol w="1755648"/>
-                <a:gridCol w="1755648"/>
-                <a:gridCol w="1755648"/>
-                <a:gridCol w="1755648"/>
-                <a:gridCol w="1755648"/>
+                <a:gridCol w="2103120">
+                  <a:extLst>
+                    <a:ext uri="{9D8B030D-6E8A-4147-A177-3AD203B41FA5}">
+                      <a16:colId xmlns:a16="http://schemas.microsoft.com/office/drawing/2014/main" val="20000"/>
+                    </a:ext>
+                  </a:extLst>
+                </a:gridCol>
+                <a:gridCol w="1755648">
+                  <a:extLst>
+                    <a:ext uri="{9D8B030D-6E8A-4147-A177-3AD203B41FA5}">
+                      <a16:colId xmlns:a16="http://schemas.microsoft.com/office/drawing/2014/main" val="20001"/>
+                    </a:ext>
+                  </a:extLst>
+                </a:gridCol>
+                <a:gridCol w="1755648">
+                  <a:extLst>
+                    <a:ext uri="{9D8B030D-6E8A-4147-A177-3AD203B41FA5}">
+                      <a16:colId xmlns:a16="http://schemas.microsoft.com/office/drawing/2014/main" val="20002"/>
+                    </a:ext>
+                  </a:extLst>
+                </a:gridCol>
+                <a:gridCol w="1755648">
+                  <a:extLst>
+                    <a:ext uri="{9D8B030D-6E8A-4147-A177-3AD203B41FA5}">
+                      <a16:colId xmlns:a16="http://schemas.microsoft.com/office/drawing/2014/main" val="20003"/>
+                    </a:ext>
+                  </a:extLst>
+                </a:gridCol>
+                <a:gridCol w="1755648">
+                  <a:extLst>
+                    <a:ext uri="{9D8B030D-6E8A-4147-A177-3AD203B41FA5}">
+                      <a16:colId xmlns:a16="http://schemas.microsoft.com/office/drawing/2014/main" val="20004"/>
+                    </a:ext>
+                  </a:extLst>
+                </a:gridCol>
+                <a:gridCol w="1755648">
+                  <a:extLst>
+                    <a:ext uri="{9D8B030D-6E8A-4147-A177-3AD203B41FA5}">
+                      <a16:colId xmlns:a16="http://schemas.microsoft.com/office/drawing/2014/main" val="20005"/>
+                    </a:ext>
+                  </a:extLst>
+                </a:gridCol>
               </a:tblGrid>
               <a:tr h="310896">
                 <a:tc>
@@ -6322,7 +6136,7 @@
                     <a:bodyPr/>
                     <a:lstStyle/>
                     <a:p>
-                      <a:pPr algn="ctr" indent="0" marL="0">
+                      <a:pPr marL="0" indent="0" algn="ctr">
                         <a:buNone/>
                       </a:pPr>
                       <a:r>
@@ -6343,7 +6157,7 @@
                       </a:endParaRPr>
                     </a:p>
                   </a:txBody>
-                  <a:tcPr marL="91440" marR="91440" marT="45720" marB="45720" anchor="ctr">
+                  <a:tcPr anchor="ctr">
                     <a:lnL w="12700" cap="flat" cmpd="sng" algn="ctr">
                       <a:solidFill>
                         <a:srgbClr val="C7B8E0"/>
@@ -6390,7 +6204,7 @@
                     <a:bodyPr/>
                     <a:lstStyle/>
                     <a:p>
-                      <a:pPr algn="ctr" indent="0" marL="0">
+                      <a:pPr marL="0" indent="0" algn="ctr">
                         <a:buNone/>
                       </a:pPr>
                       <a:r>
@@ -6411,7 +6225,7 @@
                       </a:endParaRPr>
                     </a:p>
                   </a:txBody>
-                  <a:tcPr marL="91440" marR="91440" marT="45720" marB="45720" anchor="ctr">
+                  <a:tcPr anchor="ctr">
                     <a:lnL w="12700" cap="flat" cmpd="sng" algn="ctr">
                       <a:solidFill>
                         <a:srgbClr val="C7B8E0"/>
@@ -6458,7 +6272,7 @@
                     <a:bodyPr/>
                     <a:lstStyle/>
                     <a:p>
-                      <a:pPr algn="ctr" indent="0" marL="0">
+                      <a:pPr marL="0" indent="0" algn="ctr">
                         <a:buNone/>
                       </a:pPr>
                       <a:r>
@@ -6479,7 +6293,7 @@
                       </a:endParaRPr>
                     </a:p>
                   </a:txBody>
-                  <a:tcPr marL="91440" marR="91440" marT="45720" marB="45720" anchor="ctr">
+                  <a:tcPr anchor="ctr">
                     <a:lnL w="12700" cap="flat" cmpd="sng" algn="ctr">
                       <a:solidFill>
                         <a:srgbClr val="C7B8E0"/>
@@ -6526,7 +6340,7 @@
                     <a:bodyPr/>
                     <a:lstStyle/>
                     <a:p>
-                      <a:pPr algn="ctr" indent="0" marL="0">
+                      <a:pPr marL="0" indent="0" algn="ctr">
                         <a:buNone/>
                       </a:pPr>
                       <a:r>
@@ -6547,7 +6361,7 @@
                       </a:endParaRPr>
                     </a:p>
                   </a:txBody>
-                  <a:tcPr marL="91440" marR="91440" marT="45720" marB="45720" anchor="ctr">
+                  <a:tcPr anchor="ctr">
                     <a:lnL w="12700" cap="flat" cmpd="sng" algn="ctr">
                       <a:solidFill>
                         <a:srgbClr val="C7B8E0"/>
@@ -6594,7 +6408,7 @@
                     <a:bodyPr/>
                     <a:lstStyle/>
                     <a:p>
-                      <a:pPr algn="ctr" indent="0" marL="0">
+                      <a:pPr marL="0" indent="0" algn="ctr">
                         <a:buNone/>
                       </a:pPr>
                       <a:r>
@@ -6615,7 +6429,7 @@
                       </a:endParaRPr>
                     </a:p>
                   </a:txBody>
-                  <a:tcPr marL="91440" marR="91440" marT="45720" marB="45720" anchor="ctr">
+                  <a:tcPr anchor="ctr">
                     <a:lnL w="12700" cap="flat" cmpd="sng" algn="ctr">
                       <a:solidFill>
                         <a:srgbClr val="C7B8E0"/>
@@ -6662,7 +6476,7 @@
                     <a:bodyPr/>
                     <a:lstStyle/>
                     <a:p>
-                      <a:pPr algn="ctr" indent="0" marL="0">
+                      <a:pPr marL="0" indent="0" algn="ctr">
                         <a:buNone/>
                       </a:pPr>
                       <a:r>
@@ -6683,7 +6497,7 @@
                       </a:endParaRPr>
                     </a:p>
                   </a:txBody>
-                  <a:tcPr marL="91440" marR="91440" marT="45720" marB="45720" anchor="ctr">
+                  <a:tcPr anchor="ctr">
                     <a:lnL w="12700" cap="flat" cmpd="sng" algn="ctr">
                       <a:solidFill>
                         <a:srgbClr val="C7B8E0"/>
@@ -6725,6 +6539,11 @@
                     </a:solidFill>
                   </a:tcPr>
                 </a:tc>
+                <a:extLst>
+                  <a:ext uri="{0D108BD9-81ED-4DB2-BD59-A6C34878D82A}">
+                    <a16:rowId xmlns:a16="http://schemas.microsoft.com/office/drawing/2014/main" val="10000"/>
+                  </a:ext>
+                </a:extLst>
               </a:tr>
               <a:tr h="310896">
                 <a:tc>
@@ -6732,7 +6551,7 @@
                     <a:bodyPr/>
                     <a:lstStyle/>
                     <a:p>
-                      <a:pPr algn="ctr" indent="0" marL="0">
+                      <a:pPr marL="0" indent="0" algn="ctr">
                         <a:buNone/>
                       </a:pPr>
                       <a:r>
@@ -6753,7 +6572,7 @@
                       </a:endParaRPr>
                     </a:p>
                   </a:txBody>
-                  <a:tcPr marL="91440" marR="91440" marT="45720" marB="45720" anchor="ctr">
+                  <a:tcPr anchor="ctr">
                     <a:lnL w="12700" cap="flat" cmpd="sng" algn="ctr">
                       <a:solidFill>
                         <a:srgbClr val="C7B8E0"/>
@@ -6800,7 +6619,7 @@
                     <a:bodyPr/>
                     <a:lstStyle/>
                     <a:p>
-                      <a:pPr algn="ctr" indent="0" marL="0">
+                      <a:pPr marL="0" indent="0" algn="ctr">
                         <a:buNone/>
                       </a:pPr>
                       <a:r>
@@ -6821,7 +6640,7 @@
                       </a:endParaRPr>
                     </a:p>
                   </a:txBody>
-                  <a:tcPr marL="91440" marR="91440" marT="45720" marB="45720" anchor="ctr">
+                  <a:tcPr anchor="ctr">
                     <a:lnL w="12700" cap="flat" cmpd="sng" algn="ctr">
                       <a:solidFill>
                         <a:srgbClr val="C7B8E0"/>
@@ -6868,7 +6687,7 @@
                     <a:bodyPr/>
                     <a:lstStyle/>
                     <a:p>
-                      <a:pPr algn="ctr" indent="0" marL="0">
+                      <a:pPr marL="0" indent="0" algn="ctr">
                         <a:buNone/>
                       </a:pPr>
                       <a:r>
@@ -6889,7 +6708,7 @@
                       </a:endParaRPr>
                     </a:p>
                   </a:txBody>
-                  <a:tcPr marL="91440" marR="91440" marT="45720" marB="45720" anchor="ctr">
+                  <a:tcPr anchor="ctr">
                     <a:lnL w="12700" cap="flat" cmpd="sng" algn="ctr">
                       <a:solidFill>
                         <a:srgbClr val="C7B8E0"/>
@@ -6936,7 +6755,7 @@
                     <a:bodyPr/>
                     <a:lstStyle/>
                     <a:p>
-                      <a:pPr algn="ctr" indent="0" marL="0">
+                      <a:pPr marL="0" indent="0" algn="ctr">
                         <a:buNone/>
                       </a:pPr>
                       <a:r>
@@ -6957,7 +6776,7 @@
                       </a:endParaRPr>
                     </a:p>
                   </a:txBody>
-                  <a:tcPr marL="91440" marR="91440" marT="45720" marB="45720" anchor="ctr">
+                  <a:tcPr anchor="ctr">
                     <a:lnL w="12700" cap="flat" cmpd="sng" algn="ctr">
                       <a:solidFill>
                         <a:srgbClr val="C7B8E0"/>
@@ -7004,7 +6823,7 @@
                     <a:bodyPr/>
                     <a:lstStyle/>
                     <a:p>
-                      <a:pPr algn="ctr" indent="0" marL="0">
+                      <a:pPr marL="0" indent="0" algn="ctr">
                         <a:buNone/>
                       </a:pPr>
                       <a:r>
@@ -7025,7 +6844,7 @@
                       </a:endParaRPr>
                     </a:p>
                   </a:txBody>
-                  <a:tcPr marL="91440" marR="91440" marT="45720" marB="45720" anchor="ctr">
+                  <a:tcPr anchor="ctr">
                     <a:lnL w="12700" cap="flat" cmpd="sng" algn="ctr">
                       <a:solidFill>
                         <a:srgbClr val="C7B8E0"/>
@@ -7072,7 +6891,7 @@
                     <a:bodyPr/>
                     <a:lstStyle/>
                     <a:p>
-                      <a:pPr algn="ctr" indent="0" marL="0">
+                      <a:pPr marL="0" indent="0" algn="ctr">
                         <a:buNone/>
                       </a:pPr>
                       <a:r>
@@ -7093,7 +6912,7 @@
                       </a:endParaRPr>
                     </a:p>
                   </a:txBody>
-                  <a:tcPr marL="91440" marR="91440" marT="45720" marB="45720" anchor="ctr">
+                  <a:tcPr anchor="ctr">
                     <a:lnL w="12700" cap="flat" cmpd="sng" algn="ctr">
                       <a:solidFill>
                         <a:srgbClr val="C7B8E0"/>
@@ -7135,6 +6954,11 @@
                     </a:solidFill>
                   </a:tcPr>
                 </a:tc>
+                <a:extLst>
+                  <a:ext uri="{0D108BD9-81ED-4DB2-BD59-A6C34878D82A}">
+                    <a16:rowId xmlns:a16="http://schemas.microsoft.com/office/drawing/2014/main" val="10001"/>
+                  </a:ext>
+                </a:extLst>
               </a:tr>
               <a:tr h="310896">
                 <a:tc>
@@ -7142,7 +6966,7 @@
                     <a:bodyPr/>
                     <a:lstStyle/>
                     <a:p>
-                      <a:pPr algn="ctr" indent="0" marL="0">
+                      <a:pPr marL="0" indent="0" algn="ctr">
                         <a:buNone/>
                       </a:pPr>
                       <a:r>
@@ -7163,7 +6987,7 @@
                       </a:endParaRPr>
                     </a:p>
                   </a:txBody>
-                  <a:tcPr marL="91440" marR="91440" marT="45720" marB="45720" anchor="ctr">
+                  <a:tcPr anchor="ctr">
                     <a:lnL w="12700" cap="flat" cmpd="sng" algn="ctr">
                       <a:solidFill>
                         <a:srgbClr val="C7B8E0"/>
@@ -7210,7 +7034,7 @@
                     <a:bodyPr/>
                     <a:lstStyle/>
                     <a:p>
-                      <a:pPr algn="ctr" indent="0" marL="0">
+                      <a:pPr marL="0" indent="0" algn="ctr">
                         <a:buNone/>
                       </a:pPr>
                       <a:r>
@@ -7231,7 +7055,7 @@
                       </a:endParaRPr>
                     </a:p>
                   </a:txBody>
-                  <a:tcPr marL="91440" marR="91440" marT="45720" marB="45720" anchor="ctr">
+                  <a:tcPr anchor="ctr">
                     <a:lnL w="12700" cap="flat" cmpd="sng" algn="ctr">
                       <a:solidFill>
                         <a:srgbClr val="C7B8E0"/>
@@ -7278,7 +7102,7 @@
                     <a:bodyPr/>
                     <a:lstStyle/>
                     <a:p>
-                      <a:pPr algn="ctr" indent="0" marL="0">
+                      <a:pPr marL="0" indent="0" algn="ctr">
                         <a:buNone/>
                       </a:pPr>
                       <a:r>
@@ -7299,7 +7123,7 @@
                       </a:endParaRPr>
                     </a:p>
                   </a:txBody>
-                  <a:tcPr marL="91440" marR="91440" marT="45720" marB="45720" anchor="ctr">
+                  <a:tcPr anchor="ctr">
                     <a:lnL w="12700" cap="flat" cmpd="sng" algn="ctr">
                       <a:solidFill>
                         <a:srgbClr val="C7B8E0"/>
@@ -7346,7 +7170,7 @@
                     <a:bodyPr/>
                     <a:lstStyle/>
                     <a:p>
-                      <a:pPr algn="ctr" indent="0" marL="0">
+                      <a:pPr marL="0" indent="0" algn="ctr">
                         <a:buNone/>
                       </a:pPr>
                       <a:r>
@@ -7367,7 +7191,7 @@
                       </a:endParaRPr>
                     </a:p>
                   </a:txBody>
-                  <a:tcPr marL="91440" marR="91440" marT="45720" marB="45720" anchor="ctr">
+                  <a:tcPr anchor="ctr">
                     <a:lnL w="12700" cap="flat" cmpd="sng" algn="ctr">
                       <a:solidFill>
                         <a:srgbClr val="C7B8E0"/>
@@ -7414,7 +7238,7 @@
                     <a:bodyPr/>
                     <a:lstStyle/>
                     <a:p>
-                      <a:pPr algn="ctr" indent="0" marL="0">
+                      <a:pPr marL="0" indent="0" algn="ctr">
                         <a:buNone/>
                       </a:pPr>
                       <a:r>
@@ -7435,7 +7259,7 @@
                       </a:endParaRPr>
                     </a:p>
                   </a:txBody>
-                  <a:tcPr marL="91440" marR="91440" marT="45720" marB="45720" anchor="ctr">
+                  <a:tcPr anchor="ctr">
                     <a:lnL w="12700" cap="flat" cmpd="sng" algn="ctr">
                       <a:solidFill>
                         <a:srgbClr val="C7B8E0"/>
@@ -7482,7 +7306,7 @@
                     <a:bodyPr/>
                     <a:lstStyle/>
                     <a:p>
-                      <a:pPr algn="ctr" indent="0" marL="0">
+                      <a:pPr marL="0" indent="0" algn="ctr">
                         <a:buNone/>
                       </a:pPr>
                       <a:r>
@@ -7503,7 +7327,7 @@
                       </a:endParaRPr>
                     </a:p>
                   </a:txBody>
-                  <a:tcPr marL="91440" marR="91440" marT="45720" marB="45720" anchor="ctr">
+                  <a:tcPr anchor="ctr">
                     <a:lnL w="12700" cap="flat" cmpd="sng" algn="ctr">
                       <a:solidFill>
                         <a:srgbClr val="C7B8E0"/>
@@ -7545,6 +7369,11 @@
                     </a:solidFill>
                   </a:tcPr>
                 </a:tc>
+                <a:extLst>
+                  <a:ext uri="{0D108BD9-81ED-4DB2-BD59-A6C34878D82A}">
+                    <a16:rowId xmlns:a16="http://schemas.microsoft.com/office/drawing/2014/main" val="10002"/>
+                  </a:ext>
+                </a:extLst>
               </a:tr>
             </a:tbl>
           </a:graphicData>
@@ -7566,6 +7395,7 @@
         <a:solidFill>
           <a:srgbClr val="FFFFFF"/>
         </a:solidFill>
+        <a:effectLst/>
       </p:bgPr>
     </p:bg>
     <p:spTree>
@@ -7603,7 +7433,7 @@
           <a:bodyPr wrap="square" lIns="0" tIns="0" rIns="0" bIns="0" rtlCol="0" anchor="ctr"/>
           <a:lstStyle/>
           <a:p>
-            <a:pPr indent="0" marL="0">
+            <a:pPr marL="0" indent="0">
               <a:buNone/>
             </a:pPr>
             <a:r>
@@ -7642,7 +7472,7 @@
           <a:bodyPr wrap="square" lIns="0" tIns="0" rIns="0" bIns="0" rtlCol="0" anchor="ctr"/>
           <a:lstStyle/>
           <a:p>
-            <a:pPr indent="0" marL="0">
+            <a:pPr marL="0" indent="0">
               <a:buNone/>
             </a:pPr>
             <a:r>
@@ -7703,7 +7533,7 @@
           <a:bodyPr wrap="square" lIns="0" tIns="0" rIns="0" bIns="0" rtlCol="0" anchor="ctr"/>
           <a:lstStyle/>
           <a:p>
-            <a:pPr algn="ctr" indent="0" marL="0">
+            <a:pPr marL="0" indent="0" algn="ctr">
               <a:buNone/>
             </a:pPr>
             <a:r>
@@ -7723,14 +7553,14 @@
       </p:sp>
       <p:pic>
         <p:nvPicPr>
-          <p:cNvPr id="6" name="Image 0" descr="preencoded.png">    </p:cNvPr>
+          <p:cNvPr id="6" name="Image 0" descr="preencoded.png"/>
           <p:cNvPicPr>
             <a:picLocks noChangeAspect="1"/>
           </p:cNvPicPr>
           <p:nvPr/>
         </p:nvPicPr>
         <p:blipFill>
-          <a:blip r:embed="rId1"/>
+          <a:blip r:embed="rId3"/>
           <a:stretch>
             <a:fillRect/>
           </a:stretch>
@@ -7788,7 +7618,7 @@
           <a:bodyPr wrap="square" lIns="0" tIns="0" rIns="0" bIns="0" rtlCol="0" anchor="ctr"/>
           <a:lstStyle/>
           <a:p>
-            <a:pPr indent="0" marL="0">
+            <a:pPr marL="0" indent="0">
               <a:buNone/>
             </a:pPr>
             <a:r>
@@ -7827,7 +7657,7 @@
           <a:bodyPr wrap="square" lIns="0" tIns="0" rIns="0" bIns="0" rtlCol="0" anchor="ctr"/>
           <a:lstStyle/>
           <a:p>
-            <a:pPr indent="0" marL="0">
+            <a:pPr marL="0" indent="0">
               <a:lnSpc>
                 <a:spcPts val="1600"/>
               </a:lnSpc>
@@ -7847,7 +7677,7 @@
             <a:endParaRPr lang="en-US" sz="1150" dirty="0"/>
           </a:p>
           <a:p>
-            <a:pPr indent="0" marL="0">
+            <a:pPr marL="0" indent="0">
               <a:lnSpc>
                 <a:spcPts val="1600"/>
               </a:lnSpc>
@@ -7856,7 +7686,7 @@
             <a:endParaRPr lang="en-US" sz="1150" dirty="0"/>
           </a:p>
           <a:p>
-            <a:pPr indent="0" marL="0">
+            <a:pPr marL="0" indent="0">
               <a:lnSpc>
                 <a:spcPts val="1600"/>
               </a:lnSpc>
@@ -7876,7 +7706,7 @@
             <a:endParaRPr lang="en-US" sz="1150" dirty="0"/>
           </a:p>
           <a:p>
-            <a:pPr indent="0" marL="0">
+            <a:pPr marL="0" indent="0">
               <a:lnSpc>
                 <a:spcPts val="1600"/>
               </a:lnSpc>
@@ -7885,7 +7715,7 @@
             <a:endParaRPr lang="en-US" sz="1150" dirty="0"/>
           </a:p>
           <a:p>
-            <a:pPr indent="0" marL="0">
+            <a:pPr marL="0" indent="0">
               <a:lnSpc>
                 <a:spcPts val="1600"/>
               </a:lnSpc>
@@ -7905,7 +7735,7 @@
             <a:endParaRPr lang="en-US" sz="1150" dirty="0"/>
           </a:p>
           <a:p>
-            <a:pPr indent="0" marL="0">
+            <a:pPr marL="0" indent="0">
               <a:lnSpc>
                 <a:spcPts val="1600"/>
               </a:lnSpc>
@@ -7914,7 +7744,7 @@
             <a:endParaRPr lang="en-US" sz="1150" dirty="0"/>
           </a:p>
           <a:p>
-            <a:pPr indent="0" marL="0">
+            <a:pPr marL="0" indent="0">
               <a:lnSpc>
                 <a:spcPts val="1600"/>
               </a:lnSpc>
@@ -7937,7 +7767,7 @@
       </p:sp>
       <p:graphicFrame>
         <p:nvGraphicFramePr>
-          <p:cNvPr id="6" name="Table 0"/>
+          <p:cNvPr id="10" name="Table 0"/>
           <p:cNvGraphicFramePr>
             <a:graphicFrameLocks noGrp="1"/>
           </p:cNvGraphicFramePr>
@@ -7951,19 +7781,55 @@
         </p:nvGraphicFramePr>
         <p:xfrm>
           <a:off x="594360" y="5486400"/>
-          <a:ext cx="10881360" cy="914400"/>
+          <a:ext cx="10881360" cy="932688"/>
         </p:xfrm>
         <a:graphic>
           <a:graphicData uri="http://schemas.openxmlformats.org/drawingml/2006/table">
             <a:tbl>
               <a:tblPr/>
               <a:tblGrid>
-                <a:gridCol w="2103120"/>
-                <a:gridCol w="1755648"/>
-                <a:gridCol w="1755648"/>
-                <a:gridCol w="1755648"/>
-                <a:gridCol w="1755648"/>
-                <a:gridCol w="1755648"/>
+                <a:gridCol w="2103120">
+                  <a:extLst>
+                    <a:ext uri="{9D8B030D-6E8A-4147-A177-3AD203B41FA5}">
+                      <a16:colId xmlns:a16="http://schemas.microsoft.com/office/drawing/2014/main" val="20000"/>
+                    </a:ext>
+                  </a:extLst>
+                </a:gridCol>
+                <a:gridCol w="1755648">
+                  <a:extLst>
+                    <a:ext uri="{9D8B030D-6E8A-4147-A177-3AD203B41FA5}">
+                      <a16:colId xmlns:a16="http://schemas.microsoft.com/office/drawing/2014/main" val="20001"/>
+                    </a:ext>
+                  </a:extLst>
+                </a:gridCol>
+                <a:gridCol w="1755648">
+                  <a:extLst>
+                    <a:ext uri="{9D8B030D-6E8A-4147-A177-3AD203B41FA5}">
+                      <a16:colId xmlns:a16="http://schemas.microsoft.com/office/drawing/2014/main" val="20002"/>
+                    </a:ext>
+                  </a:extLst>
+                </a:gridCol>
+                <a:gridCol w="1755648">
+                  <a:extLst>
+                    <a:ext uri="{9D8B030D-6E8A-4147-A177-3AD203B41FA5}">
+                      <a16:colId xmlns:a16="http://schemas.microsoft.com/office/drawing/2014/main" val="20003"/>
+                    </a:ext>
+                  </a:extLst>
+                </a:gridCol>
+                <a:gridCol w="1755648">
+                  <a:extLst>
+                    <a:ext uri="{9D8B030D-6E8A-4147-A177-3AD203B41FA5}">
+                      <a16:colId xmlns:a16="http://schemas.microsoft.com/office/drawing/2014/main" val="20004"/>
+                    </a:ext>
+                  </a:extLst>
+                </a:gridCol>
+                <a:gridCol w="1755648">
+                  <a:extLst>
+                    <a:ext uri="{9D8B030D-6E8A-4147-A177-3AD203B41FA5}">
+                      <a16:colId xmlns:a16="http://schemas.microsoft.com/office/drawing/2014/main" val="20005"/>
+                    </a:ext>
+                  </a:extLst>
+                </a:gridCol>
               </a:tblGrid>
               <a:tr h="310896">
                 <a:tc>
@@ -7971,7 +7837,7 @@
                     <a:bodyPr/>
                     <a:lstStyle/>
                     <a:p>
-                      <a:pPr algn="ctr" indent="0" marL="0">
+                      <a:pPr marL="0" indent="0" algn="ctr">
                         <a:buNone/>
                       </a:pPr>
                       <a:r>
@@ -7992,7 +7858,7 @@
                       </a:endParaRPr>
                     </a:p>
                   </a:txBody>
-                  <a:tcPr marL="91440" marR="91440" marT="45720" marB="45720" anchor="ctr">
+                  <a:tcPr anchor="ctr">
                     <a:lnL w="12700" cap="flat" cmpd="sng" algn="ctr">
                       <a:solidFill>
                         <a:srgbClr val="C7B8E0"/>
@@ -8039,7 +7905,7 @@
                     <a:bodyPr/>
                     <a:lstStyle/>
                     <a:p>
-                      <a:pPr algn="ctr" indent="0" marL="0">
+                      <a:pPr marL="0" indent="0" algn="ctr">
                         <a:buNone/>
                       </a:pPr>
                       <a:r>
@@ -8060,7 +7926,7 @@
                       </a:endParaRPr>
                     </a:p>
                   </a:txBody>
-                  <a:tcPr marL="91440" marR="91440" marT="45720" marB="45720" anchor="ctr">
+                  <a:tcPr anchor="ctr">
                     <a:lnL w="12700" cap="flat" cmpd="sng" algn="ctr">
                       <a:solidFill>
                         <a:srgbClr val="C7B8E0"/>
@@ -8107,7 +7973,7 @@
                     <a:bodyPr/>
                     <a:lstStyle/>
                     <a:p>
-                      <a:pPr algn="ctr" indent="0" marL="0">
+                      <a:pPr marL="0" indent="0" algn="ctr">
                         <a:buNone/>
                       </a:pPr>
                       <a:r>
@@ -8128,7 +7994,7 @@
                       </a:endParaRPr>
                     </a:p>
                   </a:txBody>
-                  <a:tcPr marL="91440" marR="91440" marT="45720" marB="45720" anchor="ctr">
+                  <a:tcPr anchor="ctr">
                     <a:lnL w="12700" cap="flat" cmpd="sng" algn="ctr">
                       <a:solidFill>
                         <a:srgbClr val="C7B8E0"/>
@@ -8175,7 +8041,7 @@
                     <a:bodyPr/>
                     <a:lstStyle/>
                     <a:p>
-                      <a:pPr algn="ctr" indent="0" marL="0">
+                      <a:pPr marL="0" indent="0" algn="ctr">
                         <a:buNone/>
                       </a:pPr>
                       <a:r>
@@ -8196,7 +8062,7 @@
                       </a:endParaRPr>
                     </a:p>
                   </a:txBody>
-                  <a:tcPr marL="91440" marR="91440" marT="45720" marB="45720" anchor="ctr">
+                  <a:tcPr anchor="ctr">
                     <a:lnL w="12700" cap="flat" cmpd="sng" algn="ctr">
                       <a:solidFill>
                         <a:srgbClr val="C7B8E0"/>
@@ -8243,7 +8109,7 @@
                     <a:bodyPr/>
                     <a:lstStyle/>
                     <a:p>
-                      <a:pPr algn="ctr" indent="0" marL="0">
+                      <a:pPr marL="0" indent="0" algn="ctr">
                         <a:buNone/>
                       </a:pPr>
                       <a:r>
@@ -8264,7 +8130,7 @@
                       </a:endParaRPr>
                     </a:p>
                   </a:txBody>
-                  <a:tcPr marL="91440" marR="91440" marT="45720" marB="45720" anchor="ctr">
+                  <a:tcPr anchor="ctr">
                     <a:lnL w="12700" cap="flat" cmpd="sng" algn="ctr">
                       <a:solidFill>
                         <a:srgbClr val="C7B8E0"/>
@@ -8311,7 +8177,7 @@
                     <a:bodyPr/>
                     <a:lstStyle/>
                     <a:p>
-                      <a:pPr algn="ctr" indent="0" marL="0">
+                      <a:pPr marL="0" indent="0" algn="ctr">
                         <a:buNone/>
                       </a:pPr>
                       <a:r>
@@ -8332,7 +8198,7 @@
                       </a:endParaRPr>
                     </a:p>
                   </a:txBody>
-                  <a:tcPr marL="91440" marR="91440" marT="45720" marB="45720" anchor="ctr">
+                  <a:tcPr anchor="ctr">
                     <a:lnL w="12700" cap="flat" cmpd="sng" algn="ctr">
                       <a:solidFill>
                         <a:srgbClr val="C7B8E0"/>
@@ -8374,6 +8240,11 @@
                     </a:solidFill>
                   </a:tcPr>
                 </a:tc>
+                <a:extLst>
+                  <a:ext uri="{0D108BD9-81ED-4DB2-BD59-A6C34878D82A}">
+                    <a16:rowId xmlns:a16="http://schemas.microsoft.com/office/drawing/2014/main" val="10000"/>
+                  </a:ext>
+                </a:extLst>
               </a:tr>
               <a:tr h="310896">
                 <a:tc>
@@ -8381,7 +8252,7 @@
                     <a:bodyPr/>
                     <a:lstStyle/>
                     <a:p>
-                      <a:pPr algn="ctr" indent="0" marL="0">
+                      <a:pPr marL="0" indent="0" algn="ctr">
                         <a:buNone/>
                       </a:pPr>
                       <a:r>
@@ -8402,7 +8273,7 @@
                       </a:endParaRPr>
                     </a:p>
                   </a:txBody>
-                  <a:tcPr marL="91440" marR="91440" marT="45720" marB="45720" anchor="ctr">
+                  <a:tcPr anchor="ctr">
                     <a:lnL w="12700" cap="flat" cmpd="sng" algn="ctr">
                       <a:solidFill>
                         <a:srgbClr val="C7B8E0"/>
@@ -8449,7 +8320,7 @@
                     <a:bodyPr/>
                     <a:lstStyle/>
                     <a:p>
-                      <a:pPr algn="ctr" indent="0" marL="0">
+                      <a:pPr marL="0" indent="0" algn="ctr">
                         <a:buNone/>
                       </a:pPr>
                       <a:r>
@@ -8470,7 +8341,7 @@
                       </a:endParaRPr>
                     </a:p>
                   </a:txBody>
-                  <a:tcPr marL="91440" marR="91440" marT="45720" marB="45720" anchor="ctr">
+                  <a:tcPr anchor="ctr">
                     <a:lnL w="12700" cap="flat" cmpd="sng" algn="ctr">
                       <a:solidFill>
                         <a:srgbClr val="C7B8E0"/>
@@ -8517,7 +8388,7 @@
                     <a:bodyPr/>
                     <a:lstStyle/>
                     <a:p>
-                      <a:pPr algn="ctr" indent="0" marL="0">
+                      <a:pPr marL="0" indent="0" algn="ctr">
                         <a:buNone/>
                       </a:pPr>
                       <a:r>
@@ -8538,7 +8409,7 @@
                       </a:endParaRPr>
                     </a:p>
                   </a:txBody>
-                  <a:tcPr marL="91440" marR="91440" marT="45720" marB="45720" anchor="ctr">
+                  <a:tcPr anchor="ctr">
                     <a:lnL w="12700" cap="flat" cmpd="sng" algn="ctr">
                       <a:solidFill>
                         <a:srgbClr val="C7B8E0"/>
@@ -8585,7 +8456,7 @@
                     <a:bodyPr/>
                     <a:lstStyle/>
                     <a:p>
-                      <a:pPr algn="ctr" indent="0" marL="0">
+                      <a:pPr marL="0" indent="0" algn="ctr">
                         <a:buNone/>
                       </a:pPr>
                       <a:r>
@@ -8606,7 +8477,7 @@
                       </a:endParaRPr>
                     </a:p>
                   </a:txBody>
-                  <a:tcPr marL="91440" marR="91440" marT="45720" marB="45720" anchor="ctr">
+                  <a:tcPr anchor="ctr">
                     <a:lnL w="12700" cap="flat" cmpd="sng" algn="ctr">
                       <a:solidFill>
                         <a:srgbClr val="C7B8E0"/>
@@ -8653,7 +8524,7 @@
                     <a:bodyPr/>
                     <a:lstStyle/>
                     <a:p>
-                      <a:pPr algn="ctr" indent="0" marL="0">
+                      <a:pPr marL="0" indent="0" algn="ctr">
                         <a:buNone/>
                       </a:pPr>
                       <a:r>
@@ -8674,7 +8545,7 @@
                       </a:endParaRPr>
                     </a:p>
                   </a:txBody>
-                  <a:tcPr marL="91440" marR="91440" marT="45720" marB="45720" anchor="ctr">
+                  <a:tcPr anchor="ctr">
                     <a:lnL w="12700" cap="flat" cmpd="sng" algn="ctr">
                       <a:solidFill>
                         <a:srgbClr val="C7B8E0"/>
@@ -8721,7 +8592,7 @@
                     <a:bodyPr/>
                     <a:lstStyle/>
                     <a:p>
-                      <a:pPr algn="ctr" indent="0" marL="0">
+                      <a:pPr marL="0" indent="0" algn="ctr">
                         <a:buNone/>
                       </a:pPr>
                       <a:r>
@@ -8742,7 +8613,7 @@
                       </a:endParaRPr>
                     </a:p>
                   </a:txBody>
-                  <a:tcPr marL="91440" marR="91440" marT="45720" marB="45720" anchor="ctr">
+                  <a:tcPr anchor="ctr">
                     <a:lnL w="12700" cap="flat" cmpd="sng" algn="ctr">
                       <a:solidFill>
                         <a:srgbClr val="C7B8E0"/>
@@ -8784,6 +8655,11 @@
                     </a:solidFill>
                   </a:tcPr>
                 </a:tc>
+                <a:extLst>
+                  <a:ext uri="{0D108BD9-81ED-4DB2-BD59-A6C34878D82A}">
+                    <a16:rowId xmlns:a16="http://schemas.microsoft.com/office/drawing/2014/main" val="10001"/>
+                  </a:ext>
+                </a:extLst>
               </a:tr>
               <a:tr h="310896">
                 <a:tc>
@@ -8791,7 +8667,7 @@
                     <a:bodyPr/>
                     <a:lstStyle/>
                     <a:p>
-                      <a:pPr algn="ctr" indent="0" marL="0">
+                      <a:pPr marL="0" indent="0" algn="ctr">
                         <a:buNone/>
                       </a:pPr>
                       <a:r>
@@ -8812,7 +8688,7 @@
                       </a:endParaRPr>
                     </a:p>
                   </a:txBody>
-                  <a:tcPr marL="91440" marR="91440" marT="45720" marB="45720" anchor="ctr">
+                  <a:tcPr anchor="ctr">
                     <a:lnL w="12700" cap="flat" cmpd="sng" algn="ctr">
                       <a:solidFill>
                         <a:srgbClr val="C7B8E0"/>
@@ -8859,7 +8735,7 @@
                     <a:bodyPr/>
                     <a:lstStyle/>
                     <a:p>
-                      <a:pPr algn="ctr" indent="0" marL="0">
+                      <a:pPr marL="0" indent="0" algn="ctr">
                         <a:buNone/>
                       </a:pPr>
                       <a:r>
@@ -8880,7 +8756,7 @@
                       </a:endParaRPr>
                     </a:p>
                   </a:txBody>
-                  <a:tcPr marL="91440" marR="91440" marT="45720" marB="45720" anchor="ctr">
+                  <a:tcPr anchor="ctr">
                     <a:lnL w="12700" cap="flat" cmpd="sng" algn="ctr">
                       <a:solidFill>
                         <a:srgbClr val="C7B8E0"/>
@@ -8927,7 +8803,7 @@
                     <a:bodyPr/>
                     <a:lstStyle/>
                     <a:p>
-                      <a:pPr algn="ctr" indent="0" marL="0">
+                      <a:pPr marL="0" indent="0" algn="ctr">
                         <a:buNone/>
                       </a:pPr>
                       <a:r>
@@ -8948,7 +8824,7 @@
                       </a:endParaRPr>
                     </a:p>
                   </a:txBody>
-                  <a:tcPr marL="91440" marR="91440" marT="45720" marB="45720" anchor="ctr">
+                  <a:tcPr anchor="ctr">
                     <a:lnL w="12700" cap="flat" cmpd="sng" algn="ctr">
                       <a:solidFill>
                         <a:srgbClr val="C7B8E0"/>
@@ -8995,7 +8871,7 @@
                     <a:bodyPr/>
                     <a:lstStyle/>
                     <a:p>
-                      <a:pPr algn="ctr" indent="0" marL="0">
+                      <a:pPr marL="0" indent="0" algn="ctr">
                         <a:buNone/>
                       </a:pPr>
                       <a:r>
@@ -9016,7 +8892,7 @@
                       </a:endParaRPr>
                     </a:p>
                   </a:txBody>
-                  <a:tcPr marL="91440" marR="91440" marT="45720" marB="45720" anchor="ctr">
+                  <a:tcPr anchor="ctr">
                     <a:lnL w="12700" cap="flat" cmpd="sng" algn="ctr">
                       <a:solidFill>
                         <a:srgbClr val="C7B8E0"/>
@@ -9063,7 +8939,7 @@
                     <a:bodyPr/>
                     <a:lstStyle/>
                     <a:p>
-                      <a:pPr algn="ctr" indent="0" marL="0">
+                      <a:pPr marL="0" indent="0" algn="ctr">
                         <a:buNone/>
                       </a:pPr>
                       <a:r>
@@ -9084,7 +8960,7 @@
                       </a:endParaRPr>
                     </a:p>
                   </a:txBody>
-                  <a:tcPr marL="91440" marR="91440" marT="45720" marB="45720" anchor="ctr">
+                  <a:tcPr anchor="ctr">
                     <a:lnL w="12700" cap="flat" cmpd="sng" algn="ctr">
                       <a:solidFill>
                         <a:srgbClr val="C7B8E0"/>
@@ -9131,7 +9007,7 @@
                     <a:bodyPr/>
                     <a:lstStyle/>
                     <a:p>
-                      <a:pPr algn="ctr" indent="0" marL="0">
+                      <a:pPr marL="0" indent="0" algn="ctr">
                         <a:buNone/>
                       </a:pPr>
                       <a:r>
@@ -9152,7 +9028,7 @@
                       </a:endParaRPr>
                     </a:p>
                   </a:txBody>
-                  <a:tcPr marL="91440" marR="91440" marT="45720" marB="45720" anchor="ctr">
+                  <a:tcPr anchor="ctr">
                     <a:lnL w="12700" cap="flat" cmpd="sng" algn="ctr">
                       <a:solidFill>
                         <a:srgbClr val="C7B8E0"/>
@@ -9194,6 +9070,11 @@
                     </a:solidFill>
                   </a:tcPr>
                 </a:tc>
+                <a:extLst>
+                  <a:ext uri="{0D108BD9-81ED-4DB2-BD59-A6C34878D82A}">
+                    <a16:rowId xmlns:a16="http://schemas.microsoft.com/office/drawing/2014/main" val="10002"/>
+                  </a:ext>
+                </a:extLst>
               </a:tr>
             </a:tbl>
           </a:graphicData>
@@ -9215,6 +9096,7 @@
         <a:solidFill>
           <a:srgbClr val="F4F1F9"/>
         </a:solidFill>
+        <a:effectLst/>
       </p:bgPr>
     </p:bg>
     <p:spTree>
@@ -9252,7 +9134,7 @@
           <a:bodyPr wrap="square" lIns="0" tIns="0" rIns="0" bIns="0" rtlCol="0" anchor="ctr"/>
           <a:lstStyle/>
           <a:p>
-            <a:pPr indent="0" marL="0">
+            <a:pPr marL="0" indent="0">
               <a:buNone/>
             </a:pPr>
             <a:r>
@@ -9291,7 +9173,7 @@
           <a:bodyPr wrap="square" lIns="0" tIns="0" rIns="0" bIns="0" rtlCol="0" anchor="ctr"/>
           <a:lstStyle/>
           <a:p>
-            <a:pPr indent="0" marL="0">
+            <a:pPr marL="0" indent="0">
               <a:buNone/>
             </a:pPr>
             <a:r>
@@ -9377,7 +9259,7 @@
           <a:bodyPr wrap="square" lIns="0" tIns="0" rIns="0" bIns="0" rtlCol="0" anchor="ctr"/>
           <a:lstStyle/>
           <a:p>
-            <a:pPr algn="ctr" indent="0" marL="0">
+            <a:pPr marL="0" indent="0" algn="ctr">
               <a:buNone/>
             </a:pPr>
             <a:r>
@@ -9416,7 +9298,7 @@
           <a:bodyPr wrap="square" lIns="0" tIns="0" rIns="0" bIns="0" rtlCol="0" anchor="ctr"/>
           <a:lstStyle/>
           <a:p>
-            <a:pPr indent="0" marL="0">
+            <a:pPr marL="0" indent="0">
               <a:buNone/>
             </a:pPr>
             <a:r>
@@ -9455,7 +9337,7 @@
           <a:bodyPr wrap="square" lIns="0" tIns="0" rIns="0" bIns="0" rtlCol="0" anchor="ctr"/>
           <a:lstStyle/>
           <a:p>
-            <a:pPr indent="0" marL="0">
+            <a:pPr marL="0" indent="0">
               <a:lnSpc>
                 <a:spcPts val="1700"/>
               </a:lnSpc>
@@ -9497,7 +9379,7 @@
           <a:bodyPr wrap="square" lIns="0" tIns="0" rIns="0" bIns="0" rtlCol="0" anchor="ctr"/>
           <a:lstStyle/>
           <a:p>
-            <a:pPr indent="0" marL="0">
+            <a:pPr marL="0" indent="0">
               <a:buNone/>
             </a:pPr>
             <a:r>
@@ -9509,7 +9391,7 @@
                 <a:ea typeface="Courier New" pitchFamily="34" charset="-122"/>
                 <a:cs typeface="Courier New" pitchFamily="34" charset="-120"/>
               </a:rPr>
-              <a:t>https://docs.google.com/spreadsheets/d/&lt;ID-SPREADSHEET-ANDA&gt;</a:t>
+              <a:t>https://docs.google.com/spreadsheets/d/1sF29mSTIRTucAAoCRrvLsv1N8oiuX4GXGR6kLNokzfU/edit?usp=sharing</a:t>
             </a:r>
             <a:endParaRPr lang="en-US" sz="1300" dirty="0"/>
           </a:p>
@@ -9583,7 +9465,7 @@
           <a:bodyPr wrap="square" lIns="0" tIns="0" rIns="0" bIns="0" rtlCol="0" anchor="ctr"/>
           <a:lstStyle/>
           <a:p>
-            <a:pPr algn="ctr" indent="0" marL="0">
+            <a:pPr marL="0" indent="0" algn="ctr">
               <a:buNone/>
             </a:pPr>
             <a:r>
@@ -9622,7 +9504,7 @@
           <a:bodyPr wrap="square" lIns="0" tIns="0" rIns="0" bIns="0" rtlCol="0" anchor="ctr"/>
           <a:lstStyle/>
           <a:p>
-            <a:pPr indent="0" marL="0">
+            <a:pPr marL="0" indent="0">
               <a:buNone/>
             </a:pPr>
             <a:r>
@@ -9661,7 +9543,7 @@
           <a:bodyPr wrap="square" lIns="0" tIns="0" rIns="0" bIns="0" rtlCol="0" anchor="ctr"/>
           <a:lstStyle/>
           <a:p>
-            <a:pPr indent="0" marL="0">
+            <a:pPr marL="0" indent="0">
               <a:lnSpc>
                 <a:spcPts val="1700"/>
               </a:lnSpc>
@@ -9703,7 +9585,7 @@
           <a:bodyPr wrap="square" lIns="0" tIns="0" rIns="0" bIns="0" rtlCol="0" anchor="ctr"/>
           <a:lstStyle/>
           <a:p>
-            <a:pPr indent="0" marL="0">
+            <a:pPr marL="0" indent="0">
               <a:buNone/>
             </a:pPr>
             <a:r>
@@ -9715,7 +9597,7 @@
                 <a:ea typeface="Courier New" pitchFamily="34" charset="-122"/>
                 <a:cs typeface="Courier New" pitchFamily="34" charset="-120"/>
               </a:rPr>
-              <a:t>https://github.com/&lt;username&gt;/slp-iris-classification</a:t>
+              <a:t>https://github.com/fransalwan/slp-iris-classification-fransalwan-tugas1-pmml</a:t>
             </a:r>
             <a:endParaRPr lang="en-US" sz="1300" dirty="0"/>
           </a:p>
@@ -9764,7 +9646,7 @@
           <a:bodyPr wrap="square" lIns="0" tIns="0" rIns="0" bIns="0" rtlCol="0" anchor="ctr"/>
           <a:lstStyle/>
           <a:p>
-            <a:pPr indent="0" marL="0">
+            <a:pPr marL="0" indent="0">
               <a:buNone/>
             </a:pPr>
             <a:r>
@@ -9798,6 +9680,7 @@
         <a:solidFill>
           <a:srgbClr val="FFFFFF"/>
         </a:solidFill>
+        <a:effectLst/>
       </p:bgPr>
     </p:bg>
     <p:spTree>
@@ -9835,7 +9718,7 @@
           <a:bodyPr wrap="square" lIns="0" tIns="0" rIns="0" bIns="0" rtlCol="0" anchor="ctr"/>
           <a:lstStyle/>
           <a:p>
-            <a:pPr indent="0" marL="0">
+            <a:pPr marL="0" indent="0">
               <a:buNone/>
             </a:pPr>
             <a:r>
@@ -9874,7 +9757,7 @@
           <a:bodyPr wrap="square" lIns="0" tIns="0" rIns="0" bIns="0" rtlCol="0" anchor="ctr"/>
           <a:lstStyle/>
           <a:p>
-            <a:pPr indent="0" marL="0">
+            <a:pPr marL="0" indent="0">
               <a:buNone/>
             </a:pPr>
             <a:r>
@@ -9953,7 +9836,7 @@
           <a:bodyPr wrap="square" lIns="0" tIns="0" rIns="0" bIns="0" rtlCol="0" anchor="ctr"/>
           <a:lstStyle/>
           <a:p>
-            <a:pPr algn="ctr" indent="0" marL="0">
+            <a:pPr marL="0" indent="0" algn="ctr">
               <a:buNone/>
             </a:pPr>
             <a:r>
@@ -9992,7 +9875,7 @@
           <a:bodyPr wrap="square" lIns="0" tIns="0" rIns="0" bIns="0" rtlCol="0" anchor="ctr"/>
           <a:lstStyle/>
           <a:p>
-            <a:pPr indent="0" marL="0">
+            <a:pPr marL="0" indent="0">
               <a:lnSpc>
                 <a:spcPts val="1600"/>
               </a:lnSpc>
@@ -10009,12 +9892,6 @@
               </a:rPr>
               <a:t>Rosenblatt, F. (1958).  </a:t>
             </a:r>
-            <a:pPr indent="0" marL="0">
-              <a:lnSpc>
-                <a:spcPts val="1600"/>
-              </a:lnSpc>
-              <a:buNone/>
-            </a:pPr>
             <a:r>
               <a:rPr lang="en-US" sz="1250" dirty="0">
                 <a:solidFill>
@@ -10071,7 +9948,7 @@
           <a:bodyPr wrap="square" lIns="0" tIns="0" rIns="0" bIns="0" rtlCol="0" anchor="ctr"/>
           <a:lstStyle/>
           <a:p>
-            <a:pPr algn="ctr" indent="0" marL="0">
+            <a:pPr marL="0" indent="0" algn="ctr">
               <a:buNone/>
             </a:pPr>
             <a:r>
@@ -10110,7 +9987,7 @@
           <a:bodyPr wrap="square" lIns="0" tIns="0" rIns="0" bIns="0" rtlCol="0" anchor="ctr"/>
           <a:lstStyle/>
           <a:p>
-            <a:pPr indent="0" marL="0">
+            <a:pPr marL="0" indent="0">
               <a:lnSpc>
                 <a:spcPts val="1600"/>
               </a:lnSpc>
@@ -10127,12 +10004,6 @@
               </a:rPr>
               <a:t>Fisher, R. A. (1936).  </a:t>
             </a:r>
-            <a:pPr indent="0" marL="0">
-              <a:lnSpc>
-                <a:spcPts val="1600"/>
-              </a:lnSpc>
-              <a:buNone/>
-            </a:pPr>
             <a:r>
               <a:rPr lang="en-US" sz="1250" dirty="0">
                 <a:solidFill>
@@ -10209,7 +10080,7 @@
           <a:bodyPr wrap="square" lIns="0" tIns="0" rIns="0" bIns="0" rtlCol="0" anchor="ctr"/>
           <a:lstStyle/>
           <a:p>
-            <a:pPr algn="ctr" indent="0" marL="0">
+            <a:pPr marL="0" indent="0" algn="ctr">
               <a:buNone/>
             </a:pPr>
             <a:r>
@@ -10248,7 +10119,7 @@
           <a:bodyPr wrap="square" lIns="0" tIns="0" rIns="0" bIns="0" rtlCol="0" anchor="ctr"/>
           <a:lstStyle/>
           <a:p>
-            <a:pPr indent="0" marL="0">
+            <a:pPr marL="0" indent="0">
               <a:lnSpc>
                 <a:spcPts val="1600"/>
               </a:lnSpc>
@@ -10265,12 +10136,6 @@
               </a:rPr>
               <a:t>Goodfellow, I., Bengio, Y., &amp; Courville, A. (2016).  </a:t>
             </a:r>
-            <a:pPr indent="0" marL="0">
-              <a:lnSpc>
-                <a:spcPts val="1600"/>
-              </a:lnSpc>
-              <a:buNone/>
-            </a:pPr>
             <a:r>
               <a:rPr lang="en-US" sz="1250" dirty="0">
                 <a:solidFill>
@@ -10327,7 +10192,7 @@
           <a:bodyPr wrap="square" lIns="0" tIns="0" rIns="0" bIns="0" rtlCol="0" anchor="ctr"/>
           <a:lstStyle/>
           <a:p>
-            <a:pPr algn="ctr" indent="0" marL="0">
+            <a:pPr marL="0" indent="0" algn="ctr">
               <a:buNone/>
             </a:pPr>
             <a:r>
@@ -10366,7 +10231,7 @@
           <a:bodyPr wrap="square" lIns="0" tIns="0" rIns="0" bIns="0" rtlCol="0" anchor="ctr"/>
           <a:lstStyle/>
           <a:p>
-            <a:pPr indent="0" marL="0">
+            <a:pPr marL="0" indent="0">
               <a:lnSpc>
                 <a:spcPts val="1600"/>
               </a:lnSpc>
@@ -10383,12 +10248,6 @@
               </a:rPr>
               <a:t>Dua, D., &amp; Graff, C. (2019).  </a:t>
             </a:r>
-            <a:pPr indent="0" marL="0">
-              <a:lnSpc>
-                <a:spcPts val="1600"/>
-              </a:lnSpc>
-              <a:buNone/>
-            </a:pPr>
             <a:r>
               <a:rPr lang="en-US" sz="1250" dirty="0">
                 <a:solidFill>
@@ -10465,7 +10324,7 @@
           <a:bodyPr wrap="square" lIns="0" tIns="0" rIns="0" bIns="0" rtlCol="0" anchor="ctr"/>
           <a:lstStyle/>
           <a:p>
-            <a:pPr algn="ctr" indent="0" marL="0">
+            <a:pPr marL="0" indent="0" algn="ctr">
               <a:buNone/>
             </a:pPr>
             <a:r>
@@ -10504,7 +10363,7 @@
           <a:bodyPr wrap="square" lIns="0" tIns="0" rIns="0" bIns="0" rtlCol="0" anchor="ctr"/>
           <a:lstStyle/>
           <a:p>
-            <a:pPr indent="0" marL="0">
+            <a:pPr marL="0" indent="0">
               <a:lnSpc>
                 <a:spcPts val="1600"/>
               </a:lnSpc>
@@ -10521,12 +10380,6 @@
               </a:rPr>
               <a:t>Harris, C. R., et al. (2020).  </a:t>
             </a:r>
-            <a:pPr indent="0" marL="0">
-              <a:lnSpc>
-                <a:spcPts val="1600"/>
-              </a:lnSpc>
-              <a:buNone/>
-            </a:pPr>
             <a:r>
               <a:rPr lang="en-US" sz="1250" dirty="0">
                 <a:solidFill>
@@ -10583,7 +10436,7 @@
           <a:bodyPr wrap="square" lIns="0" tIns="0" rIns="0" bIns="0" rtlCol="0" anchor="ctr"/>
           <a:lstStyle/>
           <a:p>
-            <a:pPr algn="ctr" indent="0" marL="0">
+            <a:pPr marL="0" indent="0" algn="ctr">
               <a:buNone/>
             </a:pPr>
             <a:r>
@@ -10622,7 +10475,7 @@
           <a:bodyPr wrap="square" lIns="0" tIns="0" rIns="0" bIns="0" rtlCol="0" anchor="ctr"/>
           <a:lstStyle/>
           <a:p>
-            <a:pPr indent="0" marL="0">
+            <a:pPr marL="0" indent="0">
               <a:lnSpc>
                 <a:spcPts val="1600"/>
               </a:lnSpc>
@@ -10639,12 +10492,6 @@
               </a:rPr>
               <a:t>Materi kuliah PMML.  </a:t>
             </a:r>
-            <a:pPr indent="0" marL="0">
-              <a:lnSpc>
-                <a:spcPts val="1600"/>
-              </a:lnSpc>
-              <a:buNone/>
-            </a:pPr>
             <a:r>
               <a:rPr lang="en-US" sz="1250" dirty="0">
                 <a:solidFill>
@@ -10681,7 +10528,7 @@
           <a:bodyPr wrap="square" lIns="0" tIns="0" rIns="0" bIns="0" rtlCol="0" anchor="ctr"/>
           <a:lstStyle/>
           <a:p>
-            <a:pPr indent="0" marL="0">
+            <a:pPr marL="0" indent="0">
               <a:buNone/>
             </a:pPr>
             <a:r>
@@ -11000,4 +10847,299 @@
     </a:ext>
   </a:extLst>
 </a:theme>
+</file>
+
+<file path=ppt/theme/theme2.xml><?xml version="1.0" encoding="utf-8"?>
+<a:theme xmlns:a="http://schemas.openxmlformats.org/drawingml/2006/main" name="Office Theme">
+  <a:themeElements>
+    <a:clrScheme name="Office">
+      <a:dk1>
+        <a:sysClr val="windowText" lastClr="000000"/>
+      </a:dk1>
+      <a:lt1>
+        <a:sysClr val="window" lastClr="FFFFFF"/>
+      </a:lt1>
+      <a:dk2>
+        <a:srgbClr val="44546A"/>
+      </a:dk2>
+      <a:lt2>
+        <a:srgbClr val="E7E6E6"/>
+      </a:lt2>
+      <a:accent1>
+        <a:srgbClr val="4472C4"/>
+      </a:accent1>
+      <a:accent2>
+        <a:srgbClr val="ED7D31"/>
+      </a:accent2>
+      <a:accent3>
+        <a:srgbClr val="A5A5A5"/>
+      </a:accent3>
+      <a:accent4>
+        <a:srgbClr val="FFC000"/>
+      </a:accent4>
+      <a:accent5>
+        <a:srgbClr val="5B9BD5"/>
+      </a:accent5>
+      <a:accent6>
+        <a:srgbClr val="70AD47"/>
+      </a:accent6>
+      <a:hlink>
+        <a:srgbClr val="0563C1"/>
+      </a:hlink>
+      <a:folHlink>
+        <a:srgbClr val="954F72"/>
+      </a:folHlink>
+    </a:clrScheme>
+    <a:fontScheme name="Office">
+      <a:majorFont>
+        <a:latin typeface="Calibri Light" panose="020F0302020204030204"/>
+        <a:ea typeface=""/>
+        <a:cs typeface=""/>
+        <a:font script="Jpan" typeface="游ゴシック Light"/>
+        <a:font script="Hang" typeface="맑은 고딕"/>
+        <a:font script="Hans" typeface="等线 Light"/>
+        <a:font script="Hant" typeface="新細明體"/>
+        <a:font script="Arab" typeface="Times New Roman"/>
+        <a:font script="Hebr" typeface="Times New Roman"/>
+        <a:font script="Thai" typeface="Angsana New"/>
+        <a:font script="Ethi" typeface="Nyala"/>
+        <a:font script="Beng" typeface="Vrinda"/>
+        <a:font script="Gujr" typeface="Shruti"/>
+        <a:font script="Khmr" typeface="MoolBoran"/>
+        <a:font script="Knda" typeface="Tunga"/>
+        <a:font script="Guru" typeface="Raavi"/>
+        <a:font script="Cans" typeface="Euphemia"/>
+        <a:font script="Cher" typeface="Plantagenet Cherokee"/>
+        <a:font script="Yiii" typeface="Microsoft Yi Baiti"/>
+        <a:font script="Tibt" typeface="Microsoft Himalaya"/>
+        <a:font script="Thaa" typeface="MV Boli"/>
+        <a:font script="Deva" typeface="Mangal"/>
+        <a:font script="Telu" typeface="Gautami"/>
+        <a:font script="Taml" typeface="Latha"/>
+        <a:font script="Syrc" typeface="Estrangelo Edessa"/>
+        <a:font script="Orya" typeface="Kalinga"/>
+        <a:font script="Mlym" typeface="Kartika"/>
+        <a:font script="Laoo" typeface="DokChampa"/>
+        <a:font script="Sinh" typeface="Iskoola Pota"/>
+        <a:font script="Mong" typeface="Mongolian Baiti"/>
+        <a:font script="Viet" typeface="Times New Roman"/>
+        <a:font script="Uigh" typeface="Microsoft Uighur"/>
+        <a:font script="Geor" typeface="Sylfaen"/>
+        <a:font script="Armn" typeface="Arial"/>
+        <a:font script="Bugi" typeface="Leelawadee UI"/>
+        <a:font script="Bopo" typeface="Microsoft JhengHei"/>
+        <a:font script="Java" typeface="Javanese Text"/>
+        <a:font script="Lisu" typeface="Segoe UI"/>
+        <a:font script="Mymr" typeface="Myanmar Text"/>
+        <a:font script="Nkoo" typeface="Ebrima"/>
+        <a:font script="Olck" typeface="Nirmala UI"/>
+        <a:font script="Osma" typeface="Ebrima"/>
+        <a:font script="Phag" typeface="Phagspa"/>
+        <a:font script="Syrn" typeface="Estrangelo Edessa"/>
+        <a:font script="Syrj" typeface="Estrangelo Edessa"/>
+        <a:font script="Syre" typeface="Estrangelo Edessa"/>
+        <a:font script="Sora" typeface="Nirmala UI"/>
+        <a:font script="Tale" typeface="Microsoft Tai Le"/>
+        <a:font script="Talu" typeface="Microsoft New Tai Lue"/>
+        <a:font script="Tfng" typeface="Ebrima"/>
+      </a:majorFont>
+      <a:minorFont>
+        <a:latin typeface="Calibri" panose="020F0502020204030204"/>
+        <a:ea typeface=""/>
+        <a:cs typeface=""/>
+        <a:font script="Jpan" typeface="游ゴシック"/>
+        <a:font script="Hang" typeface="맑은 고딕"/>
+        <a:font script="Hans" typeface="等线"/>
+        <a:font script="Hant" typeface="新細明體"/>
+        <a:font script="Arab" typeface="Arial"/>
+        <a:font script="Hebr" typeface="Arial"/>
+        <a:font script="Thai" typeface="Cordia New"/>
+        <a:font script="Ethi" typeface="Nyala"/>
+        <a:font script="Beng" typeface="Vrinda"/>
+        <a:font script="Gujr" typeface="Shruti"/>
+        <a:font script="Khmr" typeface="DaunPenh"/>
+        <a:font script="Knda" typeface="Tunga"/>
+        <a:font script="Guru" typeface="Raavi"/>
+        <a:font script="Cans" typeface="Euphemia"/>
+        <a:font script="Cher" typeface="Plantagenet Cherokee"/>
+        <a:font script="Yiii" typeface="Microsoft Yi Baiti"/>
+        <a:font script="Tibt" typeface="Microsoft Himalaya"/>
+        <a:font script="Thaa" typeface="MV Boli"/>
+        <a:font script="Deva" typeface="Mangal"/>
+        <a:font script="Telu" typeface="Gautami"/>
+        <a:font script="Taml" typeface="Latha"/>
+        <a:font script="Syrc" typeface="Estrangelo Edessa"/>
+        <a:font script="Orya" typeface="Kalinga"/>
+        <a:font script="Mlym" typeface="Kartika"/>
+        <a:font script="Laoo" typeface="DokChampa"/>
+        <a:font script="Sinh" typeface="Iskoola Pota"/>
+        <a:font script="Mong" typeface="Mongolian Baiti"/>
+        <a:font script="Viet" typeface="Arial"/>
+        <a:font script="Uigh" typeface="Microsoft Uighur"/>
+        <a:font script="Geor" typeface="Sylfaen"/>
+        <a:font script="Armn" typeface="Arial"/>
+        <a:font script="Bugi" typeface="Leelawadee UI"/>
+        <a:font script="Bopo" typeface="Microsoft JhengHei"/>
+        <a:font script="Java" typeface="Javanese Text"/>
+        <a:font script="Lisu" typeface="Segoe UI"/>
+        <a:font script="Mymr" typeface="Myanmar Text"/>
+        <a:font script="Nkoo" typeface="Ebrima"/>
+        <a:font script="Olck" typeface="Nirmala UI"/>
+        <a:font script="Osma" typeface="Ebrima"/>
+        <a:font script="Phag" typeface="Phagspa"/>
+        <a:font script="Syrn" typeface="Estrangelo Edessa"/>
+        <a:font script="Syrj" typeface="Estrangelo Edessa"/>
+        <a:font script="Syre" typeface="Estrangelo Edessa"/>
+        <a:font script="Sora" typeface="Nirmala UI"/>
+        <a:font script="Tale" typeface="Microsoft Tai Le"/>
+        <a:font script="Talu" typeface="Microsoft New Tai Lue"/>
+        <a:font script="Tfng" typeface="Ebrima"/>
+      </a:minorFont>
+    </a:fontScheme>
+    <a:fmtScheme name="Office">
+      <a:fillStyleLst>
+        <a:solidFill>
+          <a:schemeClr val="phClr"/>
+        </a:solidFill>
+        <a:gradFill rotWithShape="1">
+          <a:gsLst>
+            <a:gs pos="0">
+              <a:schemeClr val="phClr">
+                <a:lumMod val="110000"/>
+                <a:satMod val="105000"/>
+                <a:tint val="67000"/>
+              </a:schemeClr>
+            </a:gs>
+            <a:gs pos="50000">
+              <a:schemeClr val="phClr">
+                <a:lumMod val="105000"/>
+                <a:satMod val="103000"/>
+                <a:tint val="73000"/>
+              </a:schemeClr>
+            </a:gs>
+            <a:gs pos="100000">
+              <a:schemeClr val="phClr">
+                <a:lumMod val="105000"/>
+                <a:satMod val="109000"/>
+                <a:tint val="81000"/>
+              </a:schemeClr>
+            </a:gs>
+          </a:gsLst>
+          <a:lin ang="5400000" scaled="0"/>
+        </a:gradFill>
+        <a:gradFill rotWithShape="1">
+          <a:gsLst>
+            <a:gs pos="0">
+              <a:schemeClr val="phClr">
+                <a:satMod val="103000"/>
+                <a:lumMod val="102000"/>
+                <a:tint val="94000"/>
+              </a:schemeClr>
+            </a:gs>
+            <a:gs pos="50000">
+              <a:schemeClr val="phClr">
+                <a:satMod val="110000"/>
+                <a:lumMod val="100000"/>
+                <a:shade val="100000"/>
+              </a:schemeClr>
+            </a:gs>
+            <a:gs pos="100000">
+              <a:schemeClr val="phClr">
+                <a:lumMod val="99000"/>
+                <a:satMod val="120000"/>
+                <a:shade val="78000"/>
+              </a:schemeClr>
+            </a:gs>
+          </a:gsLst>
+          <a:lin ang="5400000" scaled="0"/>
+        </a:gradFill>
+      </a:fillStyleLst>
+      <a:lnStyleLst>
+        <a:ln w="6350" cap="flat" cmpd="sng" algn="ctr">
+          <a:solidFill>
+            <a:schemeClr val="phClr"/>
+          </a:solidFill>
+          <a:prstDash val="solid"/>
+          <a:miter lim="800000"/>
+        </a:ln>
+        <a:ln w="12700" cap="flat" cmpd="sng" algn="ctr">
+          <a:solidFill>
+            <a:schemeClr val="phClr"/>
+          </a:solidFill>
+          <a:prstDash val="solid"/>
+          <a:miter lim="800000"/>
+        </a:ln>
+        <a:ln w="19050" cap="flat" cmpd="sng" algn="ctr">
+          <a:solidFill>
+            <a:schemeClr val="phClr"/>
+          </a:solidFill>
+          <a:prstDash val="solid"/>
+          <a:miter lim="800000"/>
+        </a:ln>
+      </a:lnStyleLst>
+      <a:effectStyleLst>
+        <a:effectStyle>
+          <a:effectLst/>
+        </a:effectStyle>
+        <a:effectStyle>
+          <a:effectLst/>
+        </a:effectStyle>
+        <a:effectStyle>
+          <a:effectLst>
+            <a:outerShdw blurRad="57150" dist="19050" dir="5400000" algn="ctr" rotWithShape="0">
+              <a:srgbClr val="000000">
+                <a:alpha val="63000"/>
+              </a:srgbClr>
+            </a:outerShdw>
+          </a:effectLst>
+        </a:effectStyle>
+      </a:effectStyleLst>
+      <a:bgFillStyleLst>
+        <a:solidFill>
+          <a:schemeClr val="phClr"/>
+        </a:solidFill>
+        <a:solidFill>
+          <a:schemeClr val="phClr">
+            <a:tint val="95000"/>
+            <a:satMod val="170000"/>
+          </a:schemeClr>
+        </a:solidFill>
+        <a:gradFill rotWithShape="1">
+          <a:gsLst>
+            <a:gs pos="0">
+              <a:schemeClr val="phClr">
+                <a:tint val="93000"/>
+                <a:satMod val="150000"/>
+                <a:shade val="98000"/>
+                <a:lumMod val="102000"/>
+              </a:schemeClr>
+            </a:gs>
+            <a:gs pos="50000">
+              <a:schemeClr val="phClr">
+                <a:tint val="98000"/>
+                <a:satMod val="130000"/>
+                <a:shade val="90000"/>
+                <a:lumMod val="103000"/>
+              </a:schemeClr>
+            </a:gs>
+            <a:gs pos="100000">
+              <a:schemeClr val="phClr">
+                <a:shade val="63000"/>
+                <a:satMod val="120000"/>
+              </a:schemeClr>
+            </a:gs>
+          </a:gsLst>
+          <a:lin ang="5400000" scaled="0"/>
+        </a:gradFill>
+      </a:bgFillStyleLst>
+    </a:fmtScheme>
+  </a:themeElements>
+  <a:objectDefaults/>
+  <a:extraClrSchemeLst/>
+  <a:extLst>
+    <a:ext uri="{05A4C25C-085E-4340-85A3-A5531E510DB2}">
+      <thm15:themeFamily xmlns:thm15="http://schemas.microsoft.com/office/thememl/2012/main" name="Office Theme" id="{62F939B6-93AF-4DB8-9C6B-D6C7DFDC589F}" vid="{4A3C46E8-61CC-4603-A589-7422A47A8E4A}"/>
+    </a:ext>
+  </a:extLst>
+</a:theme>
 </file>